--- a/data-eng/decks/w3d3s2.pptx
+++ b/data-eng/decks/w3d3s2.pptx
@@ -3100,7 +3100,7 @@
       <p:grpSpPr/>
       <p:sp>
         <p:nvSpPr>
-          <p:cNvPr id="2" name="Oval 1"/>
+          <p:cNvPr id="2" name="deckgen:decor"/>
           <p:cNvSpPr/>
           <p:nvPr/>
         </p:nvSpPr>
@@ -3130,7 +3130,7 @@
       </p:sp>
       <p:sp>
         <p:nvSpPr>
-          <p:cNvPr id="3" name="Oval 2"/>
+          <p:cNvPr id="3" name="deckgen:decor"/>
           <p:cNvSpPr/>
           <p:nvPr/>
         </p:nvSpPr>
@@ -3160,7 +3160,7 @@
       </p:sp>
       <p:sp>
         <p:nvSpPr>
-          <p:cNvPr id="4" name="Oval 3"/>
+          <p:cNvPr id="4" name="deckgen:decor"/>
           <p:cNvSpPr/>
           <p:nvPr/>
         </p:nvSpPr>
@@ -3190,7 +3190,7 @@
       </p:sp>
       <p:sp>
         <p:nvSpPr>
-          <p:cNvPr id="5" name="Rectangle 4"/>
+          <p:cNvPr id="5" name="deckgen:decor"/>
           <p:cNvSpPr/>
           <p:nvPr/>
         </p:nvSpPr>
@@ -3220,7 +3220,7 @@
       </p:sp>
       <p:sp>
         <p:nvSpPr>
-          <p:cNvPr id="6" name="Oval 5"/>
+          <p:cNvPr id="6" name="deckgen:decor"/>
           <p:cNvSpPr/>
           <p:nvPr/>
         </p:nvSpPr>
@@ -3250,7 +3250,7 @@
       </p:sp>
       <p:sp>
         <p:nvSpPr>
-          <p:cNvPr id="7" name="Oval 6"/>
+          <p:cNvPr id="7" name="deckgen:decor"/>
           <p:cNvSpPr/>
           <p:nvPr/>
         </p:nvSpPr>
@@ -3280,7 +3280,7 @@
       </p:sp>
       <p:sp>
         <p:nvSpPr>
-          <p:cNvPr id="8" name="Oval 7"/>
+          <p:cNvPr id="8" name="deckgen:decor"/>
           <p:cNvSpPr/>
           <p:nvPr/>
         </p:nvSpPr>
@@ -3310,7 +3310,7 @@
       </p:sp>
       <p:sp>
         <p:nvSpPr>
-          <p:cNvPr id="9" name="Oval 8"/>
+          <p:cNvPr id="9" name="deckgen:decor"/>
           <p:cNvSpPr/>
           <p:nvPr/>
         </p:nvSpPr>
@@ -3340,7 +3340,7 @@
       </p:sp>
       <p:sp>
         <p:nvSpPr>
-          <p:cNvPr id="10" name="Rectangle 9"/>
+          <p:cNvPr id="10" name="deckgen:decor"/>
           <p:cNvSpPr/>
           <p:nvPr/>
         </p:nvSpPr>
@@ -3600,7 +3600,7 @@
       <p:grpSpPr/>
       <p:sp>
         <p:nvSpPr>
-          <p:cNvPr id="2" name="Oval 1"/>
+          <p:cNvPr id="2" name="deckgen:decor"/>
           <p:cNvSpPr/>
           <p:nvPr/>
         </p:nvSpPr>
@@ -3630,7 +3630,7 @@
       </p:sp>
       <p:sp>
         <p:nvSpPr>
-          <p:cNvPr id="3" name="Oval 2"/>
+          <p:cNvPr id="3" name="deckgen:decor"/>
           <p:cNvSpPr/>
           <p:nvPr/>
         </p:nvSpPr>
@@ -3660,7 +3660,7 @@
       </p:sp>
       <p:sp>
         <p:nvSpPr>
-          <p:cNvPr id="4" name="Oval 3"/>
+          <p:cNvPr id="4" name="deckgen:decor"/>
           <p:cNvSpPr/>
           <p:nvPr/>
         </p:nvSpPr>
@@ -3941,7 +3941,7 @@
                 <a:ea typeface="Pretendard"/>
                 <a:cs typeface="Pretendard"/>
               </a:rPr>
-              <a:t>duckdb.__version__ 이 찍히고, 서버는 띄운 적이 없다</a:t>
+              <a:t>duckdb 1.5.6 이 찍히고, 서버는 띄운 적이 없다</a:t>
             </a:r>
           </a:p>
         </p:txBody>
@@ -4087,7 +4087,7 @@
                 <a:ea typeface="Pretendard"/>
                 <a:cs typeface="Pretendard"/>
               </a:rPr>
-              <a:t>「생성 완료: 1000000 행」 · events.csv 크기를 적어 두었다</a:t>
+              <a:t>「생성 완료: 1000000 행」 · events.csv 41M 을 적어 두었다</a:t>
             </a:r>
           </a:p>
         </p:txBody>
@@ -4233,7 +4233,7 @@
                 <a:ea typeface="Pretendard"/>
                 <a:cs typeface="Pretendard"/>
               </a:rPr>
-              <a:t>GROUP BY event_type 에 view·cart·buy 3행, view 약 80만</a:t>
+              <a:t>view 799932 · cart 150025 · buy 50043 — 세 행</a:t>
             </a:r>
           </a:p>
         </p:txBody>
@@ -4379,7 +4379,7 @@
                 <a:ea typeface="Pretendard"/>
                 <a:cs typeface="Pretendard"/>
               </a:rPr>
-              <a:t>DESCRIBE 에서 ts 가 TIMESTAMP · count(*) 가 1000000</a:t>
+              <a:t>DESCRIBE 의 ts 가 TIMESTAMP · count(*) 1000000</a:t>
             </a:r>
           </a:p>
         </p:txBody>
@@ -4525,7 +4525,7 @@
                 <a:ea typeface="Pretendard"/>
                 <a:cs typeface="Pretendard"/>
               </a:rPr>
-              <a:t>다른 폴더에서 IO Error 를 봤고 pwd·ls 로 원인을 찾았다</a:t>
+              <a:t>다른 폴더에서 No files found 를 봤고 pwd 로 원인을 찾았다</a:t>
             </a:r>
           </a:p>
         </p:txBody>
@@ -4671,7 +4671,7 @@
                 <a:ea typeface="Pretendard"/>
                 <a:cs typeface="Pretendard"/>
               </a:rPr>
-              <a:t>.df() 가 DataFrame · FROM orders 로 지역 4곳 집계</a:t>
+              <a:t>.df() 가 DataFrame · FROM orders 로 지역 4행</a:t>
             </a:r>
           </a:p>
         </p:txBody>
@@ -4808,7 +4808,7 @@
       <p:grpSpPr/>
       <p:sp>
         <p:nvSpPr>
-          <p:cNvPr id="2" name="Oval 1"/>
+          <p:cNvPr id="2" name="deckgen:decor"/>
           <p:cNvSpPr/>
           <p:nvPr/>
         </p:nvSpPr>
@@ -4838,7 +4838,7 @@
       </p:sp>
       <p:sp>
         <p:nvSpPr>
-          <p:cNvPr id="3" name="Oval 2"/>
+          <p:cNvPr id="3" name="deckgen:decor"/>
           <p:cNvSpPr/>
           <p:nvPr/>
         </p:nvSpPr>
@@ -5014,7 +5014,7 @@
                 <a:ea typeface="Pretendard"/>
                 <a:cs typeface="Pretendard"/>
               </a:rPr>
-              <a:t>COPY 로 CSV 를 zstd Parquet 로 바꾸고, 크기와 질의 속도를 직접 재서 열 지향의 효과를 수치로 확인합니다</a:t>
+              <a:t>speed.py 한 파일에 이어 붙이며 CSV 를 zstd Parquet 로 바꾸고, 크기와 질의 속도를 직접 잽니다</a:t>
             </a:r>
           </a:p>
         </p:txBody>
@@ -5122,7 +5122,7 @@
               </a:lnSpc>
             </a:pPr>
             <a:r>
-              <a:rPr sz="2100" b="1">
+              <a:rPr sz="2475" b="1">
                 <a:solidFill>
                   <a:srgbClr val="0D2B5E"/>
                 </a:solidFill>
@@ -5130,7 +5130,7 @@
                 <a:ea typeface="Pretendard"/>
                 <a:cs typeface="Pretendard"/>
               </a:rPr>
-              <a:t>COPY … TO 'events.parquet' (COMPRESSION zstd)</a:t>
+              <a:t>COPY … TO 'events.parquet' (zstd)</a:t>
             </a:r>
           </a:p>
         </p:txBody>
@@ -5246,7 +5246,7 @@
                 <a:ea typeface="Pretendard"/>
                 <a:cs typeface="Pretendard"/>
               </a:rPr>
-              <a:t>파일 크기 배율 · 질의 속도 배율</a:t>
+              <a:t>크기 배율 · 질의 속도 배율</a:t>
             </a:r>
           </a:p>
         </p:txBody>
@@ -5362,7 +5362,7 @@
                 <a:ea typeface="Pretendard"/>
                 <a:cs typeface="Pretendard"/>
               </a:rPr>
-              <a:t>한 열만 vs 전부 읽기 — 왜 빠른가</a:t>
+              <a:t>한 열 vs 다섯 열 — 일부러 틀린 비교부터</a:t>
             </a:r>
           </a:p>
         </p:txBody>
@@ -5590,7 +5590,7 @@
                 <a:ea typeface="Pretendard"/>
                 <a:cs typeface="Pretendard"/>
               </a:rPr>
-              <a:t>events.csv 와 그 크기(MB) 기록</a:t>
+              <a:t>events.csv 41M 기록 · query.py</a:t>
             </a:r>
           </a:p>
         </p:txBody>
@@ -5615,7 +5615,7 @@
       <p:grpSpPr/>
       <p:sp>
         <p:nvSpPr>
-          <p:cNvPr id="2" name="Oval 1"/>
+          <p:cNvPr id="2" name="deckgen:decor"/>
           <p:cNvSpPr/>
           <p:nvPr/>
         </p:nvSpPr>
@@ -5645,7 +5645,7 @@
       </p:sp>
       <p:sp>
         <p:nvSpPr>
-          <p:cNvPr id="3" name="Oval 2"/>
+          <p:cNvPr id="3" name="deckgen:decor"/>
           <p:cNvSpPr/>
           <p:nvPr/>
         </p:nvSpPr>
@@ -5675,7 +5675,7 @@
       </p:sp>
       <p:sp>
         <p:nvSpPr>
-          <p:cNvPr id="4" name="Oval 3"/>
+          <p:cNvPr id="4" name="deckgen:decor"/>
           <p:cNvSpPr/>
           <p:nvPr/>
         </p:nvSpPr>
@@ -5956,7 +5956,7 @@
                 <a:ea typeface="Pretendard"/>
                 <a:cs typeface="Pretendard"/>
               </a:rPr>
-              <a:t>pip install duckdb 한 줄로 설치하고 버전을 확인한다</a:t>
+              <a:t>3-2 정리 때 설치한 duckdb 판(1.5.6)을 확인한다</a:t>
             </a:r>
           </a:p>
         </p:txBody>
@@ -6102,7 +6102,7 @@
                 <a:ea typeface="Pretendard"/>
                 <a:cs typeface="Pretendard"/>
               </a:rPr>
-              <a:t>시드 고정 100만 행 events.csv 를 만들고 크기를 기록한다</a:t>
+              <a:t>시드 고정 100만 행 events.csv 를 만들고 크기(41M)를 적는다</a:t>
             </a:r>
           </a:p>
         </p:txBody>
@@ -6248,7 +6248,7 @@
                 <a:ea typeface="Pretendard"/>
                 <a:cs typeface="Pretendard"/>
               </a:rPr>
-              <a:t>CREATE TABLE·INSERT 없이 CSV 를 FROM 에 적어 질의한다</a:t>
+              <a:t>query.py 에 이어 붙이며 CSV 를 FROM 에 적어 바로 질의한다</a:t>
             </a:r>
           </a:p>
         </p:txBody>
@@ -6394,7 +6394,7 @@
                 <a:ea typeface="Pretendard"/>
                 <a:cs typeface="Pretendard"/>
               </a:rPr>
-              <a:t>.df() 로 DataFrame 을 받고, 반대로 DataFrame 을 SQL 에서 참조한다</a:t>
+              <a:t>.df() 로 결과를 받고, DataFrame 을 SQL 에서 참조한다</a:t>
             </a:r>
           </a:p>
         </p:txBody>
@@ -6469,7 +6469,7 @@
                 <a:ea typeface="Pretendard"/>
                 <a:cs typeface="Pretendard"/>
               </a:rPr>
-              <a:t>events.csv 의 크기(MB)는 다음 1.5H 에서 Parquet 와 비교하니 꼭 적어 두세요</a:t>
+              <a:t>events.csv 크기(41M)는 다음 1.5H 에서 Parquet 와 비교하니 꼭 적어 두세요</a:t>
             </a:r>
           </a:p>
         </p:txBody>
@@ -6606,7 +6606,7 @@
       <p:grpSpPr/>
       <p:sp>
         <p:nvSpPr>
-          <p:cNvPr id="2" name="Oval 1"/>
+          <p:cNvPr id="2" name="deckgen:decor"/>
           <p:cNvSpPr/>
           <p:nvPr/>
         </p:nvSpPr>
@@ -6636,7 +6636,7 @@
       </p:sp>
       <p:sp>
         <p:nvSpPr>
-          <p:cNvPr id="3" name="Oval 2"/>
+          <p:cNvPr id="3" name="deckgen:decor"/>
           <p:cNvSpPr/>
           <p:nvPr/>
         </p:nvSpPr>
@@ -6666,7 +6666,7 @@
       </p:sp>
       <p:sp>
         <p:nvSpPr>
-          <p:cNvPr id="4" name="Oval 3"/>
+          <p:cNvPr id="4" name="deckgen:decor"/>
           <p:cNvSpPr/>
           <p:nvPr/>
         </p:nvSpPr>
@@ -6842,7 +6842,7 @@
                 <a:ea typeface="Pretendard"/>
                 <a:cs typeface="Pretendard"/>
               </a:rPr>
-              <a:t>venv 를 켜고 시작합니다 — Windows(WSL2)·macOS·리눅스 모두 같은 명령</a:t>
+              <a:t>make_events.py 는 단독으로 한 번, 3~6단계는 query.py 에 이어 붙여 매번 python3 query.py</a:t>
             </a:r>
           </a:p>
         </p:txBody>
@@ -6947,7 +6947,7 @@
                 <a:ea typeface="Pretendard"/>
                 <a:cs typeface="Pretendard"/>
               </a:rPr>
-              <a:t>1. 설치</a:t>
+              <a:t>1. duckdb 확인</a:t>
             </a:r>
           </a:p>
         </p:txBody>
@@ -6988,7 +6988,7 @@
                 <a:ea typeface="Pretendard"/>
                 <a:cs typeface="Pretendard"/>
               </a:rPr>
-              <a:t>pip install duckdb</a:t>
+              <a:t>1.5.6</a:t>
             </a:r>
           </a:p>
           <a:p>
@@ -7006,7 +7006,7 @@
                 <a:ea typeface="Pretendard"/>
                 <a:cs typeface="Pretendard"/>
               </a:rPr>
-              <a:t>버전 확인</a:t>
+              <a:t>3-2 때 설치</a:t>
             </a:r>
           </a:p>
         </p:txBody>
@@ -7170,7 +7170,7 @@
                 <a:ea typeface="Pretendard"/>
                 <a:cs typeface="Pretendard"/>
               </a:rPr>
-              <a:t>시드 42</a:t>
+              <a:t>단독 · 41M</a:t>
             </a:r>
           </a:p>
         </p:txBody>
@@ -7316,7 +7316,7 @@
                 <a:ea typeface="Pretendard"/>
                 <a:cs typeface="Pretendard"/>
               </a:rPr>
-              <a:t>FROM 'events.csv'</a:t>
+              <a:t>query.py 시작</a:t>
             </a:r>
           </a:p>
           <a:p>
@@ -7799,7 +7799,7 @@
       <p:grpSpPr/>
       <p:sp>
         <p:nvSpPr>
-          <p:cNvPr id="2" name="Oval 1"/>
+          <p:cNvPr id="2" name="deckgen:decor"/>
           <p:cNvSpPr/>
           <p:nvPr/>
         </p:nvSpPr>
@@ -7829,7 +7829,7 @@
       </p:sp>
       <p:sp>
         <p:nvSpPr>
-          <p:cNvPr id="3" name="Oval 2"/>
+          <p:cNvPr id="3" name="deckgen:decor"/>
           <p:cNvSpPr/>
           <p:nvPr/>
         </p:nvSpPr>
@@ -7859,7 +7859,7 @@
       </p:sp>
       <p:sp>
         <p:nvSpPr>
-          <p:cNvPr id="4" name="Oval 3"/>
+          <p:cNvPr id="4" name="deckgen:decor"/>
           <p:cNvSpPr/>
           <p:nvPr/>
         </p:nvSpPr>
@@ -7964,7 +7964,7 @@
                 <a:ea typeface="Pretendard"/>
                 <a:cs typeface="Pretendard"/>
               </a:rPr>
-              <a:t>설치와 데이터 생성 — 핵심 명령</a:t>
+              <a:t>판 확인과 데이터 생성 — 핵심 명령</a:t>
             </a:r>
           </a:p>
         </p:txBody>
@@ -8209,7 +8209,7 @@
                 <a:ea typeface="Pretendard"/>
                 <a:cs typeface="Pretendard"/>
               </a:rPr>
-              <a:t>설치</a:t>
+              <a:t>판 확인</a:t>
             </a:r>
           </a:p>
         </p:txBody>
@@ -8282,7 +8282,7 @@
                 <a:ea typeface="Pretendard"/>
                 <a:cs typeface="Pretendard"/>
               </a:rPr>
-              <a:t>pip install duckdb</a:t>
+              <a:t>python3 -c "import duckdb; print(duckdb.__version__)"</a:t>
             </a:r>
           </a:p>
         </p:txBody>
@@ -8353,7 +8353,7 @@
                 <a:ea typeface="Pretendard"/>
                 <a:cs typeface="Pretendard"/>
               </a:rPr>
-              <a:t>버전 확인</a:t>
+              <a:t>없으면</a:t>
             </a:r>
           </a:p>
         </p:txBody>
@@ -8426,7 +8426,7 @@
                 <a:ea typeface="Pretendard"/>
                 <a:cs typeface="Pretendard"/>
               </a:rPr>
-              <a:t>python -c "import duckdb; print(duckdb.__version__)"</a:t>
+              <a:t>No module named 'duckdb' 일 때만 pip install duckdb</a:t>
             </a:r>
           </a:p>
         </p:txBody>
@@ -8755,7 +8755,7 @@
                 <a:ea typeface="Pretendard"/>
                 <a:cs typeface="Pretendard"/>
               </a:rPr>
-              <a:t>시드 42 고정 — 누가 실행해도 같은 데이터 · 1~2분 · 메모리가 빠듯하면 n 을 30만으로 줄여도 된다</a:t>
+              <a:t>시드 42 고정 — 누가 실행해도 같은 데이터 · 이 맥에서 4초 · 메모리가 빠듯하면 n 을 30만으로(노트 수치와 달라진다)</a:t>
             </a:r>
           </a:p>
         </p:txBody>
@@ -8892,7 +8892,7 @@
       <p:grpSpPr/>
       <p:sp>
         <p:nvSpPr>
-          <p:cNvPr id="2" name="Oval 1"/>
+          <p:cNvPr id="2" name="deckgen:decor"/>
           <p:cNvSpPr/>
           <p:nvPr/>
         </p:nvSpPr>
@@ -8922,7 +8922,7 @@
       </p:sp>
       <p:sp>
         <p:nvSpPr>
-          <p:cNvPr id="3" name="Oval 2"/>
+          <p:cNvPr id="3" name="deckgen:decor"/>
           <p:cNvSpPr/>
           <p:nvPr/>
         </p:nvSpPr>
@@ -8952,7 +8952,7 @@
       </p:sp>
       <p:sp>
         <p:nvSpPr>
-          <p:cNvPr id="4" name="Oval 3"/>
+          <p:cNvPr id="4" name="deckgen:decor"/>
           <p:cNvSpPr/>
           <p:nvPr/>
         </p:nvSpPr>
@@ -9233,7 +9233,7 @@
                 <a:ea typeface="Pretendard"/>
                 <a:cs typeface="Pretendard"/>
               </a:rPr>
-              <a:t>버전 번호가 출력되면 설치 완료</a:t>
+              <a:t>1.5.6 이 찍히면 준비 완료</a:t>
             </a:r>
           </a:p>
         </p:txBody>
@@ -9274,7 +9274,7 @@
                 <a:ea typeface="Pretendard"/>
                 <a:cs typeface="Pretendard"/>
               </a:rPr>
-              <a:t>컨테이너도 포트도 계정도 없다 — 2주차 MySQL 과 비교해 보세요</a:t>
+              <a:t>서버를 띄운 적이 없다 — 2주차 MySQL 은 컨테이너부터 띄웠다</a:t>
             </a:r>
           </a:p>
         </p:txBody>
@@ -9607,7 +9607,7 @@
                 <a:ea typeface="Pretendard"/>
                 <a:cs typeface="Pretendard"/>
               </a:rPr>
-              <a:t>events.csv 가 수십 MB</a:t>
+              <a:t>events.csv 41M (42,525,663 bytes)</a:t>
             </a:r>
           </a:p>
         </p:txBody>
@@ -9648,7 +9648,7 @@
                 <a:ea typeface="Pretendard"/>
                 <a:cs typeface="Pretendard"/>
               </a:rPr>
-              <a:t>이 크기를 기록 — 다음 시간에 Parquet 와 비교한다</a:t>
+              <a:t>이 크기를 기록 — 1.5H 에서 Parquet 와 비교한다</a:t>
             </a:r>
           </a:p>
         </p:txBody>
@@ -9919,7 +9919,7 @@
       <p:grpSpPr/>
       <p:sp>
         <p:nvSpPr>
-          <p:cNvPr id="2" name="Oval 1"/>
+          <p:cNvPr id="2" name="deckgen:decor"/>
           <p:cNvSpPr/>
           <p:nvPr/>
         </p:nvSpPr>
@@ -9949,7 +9949,7 @@
       </p:sp>
       <p:sp>
         <p:nvSpPr>
-          <p:cNvPr id="3" name="Oval 2"/>
+          <p:cNvPr id="3" name="deckgen:decor"/>
           <p:cNvSpPr/>
           <p:nvPr/>
         </p:nvSpPr>
@@ -9979,7 +9979,7 @@
       </p:sp>
       <p:sp>
         <p:nvSpPr>
-          <p:cNvPr id="4" name="Oval 3"/>
+          <p:cNvPr id="4" name="deckgen:decor"/>
           <p:cNvSpPr/>
           <p:nvPr/>
         </p:nvSpPr>
@@ -10043,7 +10043,7 @@
                 <a:ea typeface="Pretendard"/>
                 <a:cs typeface="Pretendard"/>
               </a:rPr>
-              <a:t>3단계</a:t>
+              <a:t>3·4단계</a:t>
             </a:r>
           </a:p>
         </p:txBody>
@@ -10084,7 +10084,7 @@
                 <a:ea typeface="Pretendard"/>
                 <a:cs typeface="Pretendard"/>
               </a:rPr>
-              <a:t>적재 없이 CSV 를 바로 질의 — FROM 'events.csv'</a:t>
+              <a:t>적재 없이 CSV 를 바로 질의 — query.py</a:t>
             </a:r>
           </a:p>
         </p:txBody>
@@ -10301,7 +10301,7 @@
                 <a:ea typeface="Pretendard"/>
                 <a:cs typeface="Pretendard"/>
               </a:rPr>
-              <a:t>파일 경로를 FROM 에 그대로 — CREATE TABLE 도 INSERT 도 없다</a:t>
+              <a:t>CREATE TABLE 도 INSERT 도 없다 — 파일 이름을 duckdb.py 로 짓지 않는다</a:t>
             </a:r>
           </a:p>
         </p:txBody>
@@ -10447,7 +10447,7 @@
                 <a:ea typeface="Pretendard"/>
                 <a:cs typeface="Pretendard"/>
               </a:rPr>
-              <a:t>view·cart·buy 세 행이 나온다</a:t>
+              <a:t>view 799932 · cart 150025 · buy 50043</a:t>
             </a:r>
           </a:p>
         </p:txBody>
@@ -10488,7 +10488,7 @@
                 <a:ea typeface="Pretendard"/>
                 <a:cs typeface="Pretendard"/>
               </a:rPr>
-              <a:t>view 가 약 80만 건으로 가장 많다 — 생성 확률 0.8·0.15·0.05 그대로</a:t>
+              <a:t>생성 확률 0.8·0.15·0.05 그대로</a:t>
             </a:r>
           </a:p>
         </p:txBody>
@@ -10634,7 +10634,7 @@
                 <a:ea typeface="Pretendard"/>
                 <a:cs typeface="Pretendard"/>
               </a:rPr>
-              <a:t>DESCRIBE SELECT * FROM 'events.csv'</a:t>
+              <a:t>DESCRIBE — ts 가 TIMESTAMP</a:t>
             </a:r>
           </a:p>
         </p:txBody>
@@ -10675,7 +10675,7 @@
                 <a:ea typeface="Pretendard"/>
                 <a:cs typeface="Pretendard"/>
               </a:rPr>
-              <a:t>열 5개와 타입 — ts 가 TIMESTAMP 로 추론됐는지 확인(Pandas 와 다른 점)</a:t>
+              <a:t>3-1 의 pd.read_csv 는 문자열 — DuckDB 는 날짜를 알아서 잡는다</a:t>
             </a:r>
           </a:p>
         </p:txBody>
@@ -10862,7 +10862,7 @@
                 <a:ea typeface="Pretendard"/>
                 <a:cs typeface="Pretendard"/>
               </a:rPr>
-              <a:t>앞 다섯 줄과 행 수 1000000</a:t>
+              <a:t>첫 줄 0 · 4463 · view · 5700 … · 행 수 1000000</a:t>
             </a:r>
           </a:p>
         </p:txBody>
@@ -11133,7 +11133,7 @@
       <p:grpSpPr/>
       <p:sp>
         <p:nvSpPr>
-          <p:cNvPr id="2" name="Oval 1"/>
+          <p:cNvPr id="2" name="deckgen:decor"/>
           <p:cNvSpPr/>
           <p:nvPr/>
         </p:nvSpPr>
@@ -11163,7 +11163,7 @@
       </p:sp>
       <p:sp>
         <p:nvSpPr>
-          <p:cNvPr id="3" name="Oval 2"/>
+          <p:cNvPr id="3" name="deckgen:decor"/>
           <p:cNvSpPr/>
           <p:nvPr/>
         </p:nvSpPr>
@@ -11193,7 +11193,7 @@
       </p:sp>
       <p:sp>
         <p:nvSpPr>
-          <p:cNvPr id="4" name="Oval 3"/>
+          <p:cNvPr id="4" name="deckgen:decor"/>
           <p:cNvSpPr/>
           <p:nvPr/>
         </p:nvSpPr>
@@ -11257,7 +11257,7 @@
                 <a:ea typeface="Pretendard"/>
                 <a:cs typeface="Pretendard"/>
               </a:rPr>
-              <a:t>5단계</a:t>
+              <a:t>일부러 실패시키기</a:t>
             </a:r>
           </a:p>
         </p:txBody>
@@ -11298,7 +11298,7 @@
                 <a:ea typeface="Pretendard"/>
                 <a:cs typeface="Pretendard"/>
               </a:rPr>
-              <a:t>조건과 집계 — 2-2 에서 배운 SQL 이 그대로 통한다</a:t>
+              <a:t>3단계 뒤 — 다른 폴더에서 돌려 IO Error 를 본다</a:t>
             </a:r>
           </a:p>
         </p:txBody>
@@ -11335,235 +11335,59 @@
       </p:sp>
       <p:sp>
         <p:nvSpPr>
-          <p:cNvPr id="8" name="Rectangle 7"/>
+          <p:cNvPr id="8" name="TextBox 7"/>
+          <p:cNvSpPr txBox="1"/>
+          <p:nvPr/>
+        </p:nvSpPr>
+        <p:spPr>
+          <a:xfrm>
+            <a:off x="1143000" y="3067050"/>
+            <a:ext cx="16002000" cy="438150"/>
+          </a:xfrm>
+          <a:prstGeom prst="rect">
+            <a:avLst/>
+          </a:prstGeom>
+          <a:noFill/>
+        </p:spPr>
+        <p:txBody>
+          <a:bodyPr wrap="square" lIns="0" rIns="0" tIns="0" bIns="0" anchor="t">
+            <a:spAutoFit/>
+          </a:bodyPr>
+          <a:lstStyle/>
+          <a:p>
+            <a:pPr algn="l">
+              <a:lnSpc>
+                <a:spcPct val="130000"/>
+              </a:lnSpc>
+            </a:pPr>
+            <a:r>
+              <a:rPr sz="2550" b="1">
+                <a:solidFill>
+                  <a:srgbClr val="3D3D3D"/>
+                </a:solidFill>
+                <a:latin typeface="Pretendard"/>
+                <a:ea typeface="Pretendard"/>
+                <a:cs typeface="Pretendard"/>
+              </a:rPr>
+              <a:t>경로는 「실행하는 폴더」 기준 — 오늘 가장 많이 만날 오류를 직접 냅니다</a:t>
+            </a:r>
+          </a:p>
+        </p:txBody>
+      </p:sp>
+      <p:sp>
+        <p:nvSpPr>
+          <p:cNvPr id="9" name="Rounded Rectangle 8"/>
           <p:cNvSpPr/>
           <p:nvPr/>
         </p:nvSpPr>
         <p:spPr>
           <a:xfrm>
-            <a:off x="1143000" y="2781300"/>
-            <a:ext cx="8763000" cy="590550"/>
-          </a:xfrm>
-          <a:prstGeom prst="rect">
-            <a:avLst/>
-          </a:prstGeom>
-          <a:solidFill>
-            <a:srgbClr val="0D2B5E"/>
-          </a:solidFill>
-          <a:ln>
-            <a:noFill/>
-          </a:ln>
-          <a:effectLst/>
-        </p:spPr>
-        <p:txBody>
-          <a:bodyPr rtlCol="0" anchor="ctr" wrap="square"/>
-          <a:lstStyle/>
-          <a:p>
-            <a:pPr algn="ctr"/>
-          </a:p>
-        </p:txBody>
-      </p:sp>
-      <p:sp>
-        <p:nvSpPr>
-          <p:cNvPr id="9" name="TextBox 8"/>
-          <p:cNvSpPr txBox="1"/>
-          <p:nvPr/>
-        </p:nvSpPr>
-        <p:spPr>
-          <a:xfrm>
-            <a:off x="1143000" y="2781300"/>
-            <a:ext cx="8763000" cy="590550"/>
-          </a:xfrm>
-          <a:prstGeom prst="rect">
-            <a:avLst/>
-          </a:prstGeom>
-          <a:noFill/>
-        </p:spPr>
-        <p:txBody>
-          <a:bodyPr wrap="square" lIns="0" rIns="0" tIns="0" bIns="0" anchor="ctr">
-            <a:spAutoFit/>
-          </a:bodyPr>
-          <a:lstStyle/>
-          <a:p>
-            <a:pPr algn="ctr">
-              <a:lnSpc>
-                <a:spcPct val="100000"/>
-              </a:lnSpc>
-            </a:pPr>
-            <a:r>
-              <a:rPr sz="2025" b="1">
-                <a:solidFill>
-                  <a:srgbClr val="FFFFFF"/>
-                </a:solidFill>
-                <a:latin typeface="Pretendard"/>
-                <a:ea typeface="Pretendard"/>
-                <a:cs typeface="Pretendard"/>
-              </a:rPr>
-              <a:t>질의</a:t>
-            </a:r>
-          </a:p>
-        </p:txBody>
-      </p:sp>
-      <p:sp>
-        <p:nvSpPr>
-          <p:cNvPr id="10" name="Rectangle 9"/>
-          <p:cNvSpPr/>
-          <p:nvPr/>
-        </p:nvSpPr>
-        <p:spPr>
-          <a:xfrm>
-            <a:off x="9944100" y="2781300"/>
-            <a:ext cx="7200900" cy="590550"/>
-          </a:xfrm>
-          <a:prstGeom prst="rect">
-            <a:avLst/>
-          </a:prstGeom>
-          <a:solidFill>
-            <a:srgbClr val="1E5BC6"/>
-          </a:solidFill>
-          <a:ln>
-            <a:noFill/>
-          </a:ln>
-          <a:effectLst/>
-        </p:spPr>
-        <p:txBody>
-          <a:bodyPr rtlCol="0" anchor="ctr" wrap="square"/>
-          <a:lstStyle/>
-          <a:p>
-            <a:pPr algn="ctr"/>
-          </a:p>
-        </p:txBody>
-      </p:sp>
-      <p:sp>
-        <p:nvSpPr>
-          <p:cNvPr id="11" name="TextBox 10"/>
-          <p:cNvSpPr txBox="1"/>
-          <p:nvPr/>
-        </p:nvSpPr>
-        <p:spPr>
-          <a:xfrm>
-            <a:off x="9944100" y="2781300"/>
-            <a:ext cx="7200900" cy="590550"/>
-          </a:xfrm>
-          <a:prstGeom prst="rect">
-            <a:avLst/>
-          </a:prstGeom>
-          <a:noFill/>
-        </p:spPr>
-        <p:txBody>
-          <a:bodyPr wrap="square" lIns="0" rIns="0" tIns="0" bIns="0" anchor="ctr">
-            <a:spAutoFit/>
-          </a:bodyPr>
-          <a:lstStyle/>
-          <a:p>
-            <a:pPr algn="ctr">
-              <a:lnSpc>
-                <a:spcPct val="100000"/>
-              </a:lnSpc>
-            </a:pPr>
-            <a:r>
-              <a:rPr sz="2025" b="1">
-                <a:solidFill>
-                  <a:srgbClr val="FFFFFF"/>
-                </a:solidFill>
-                <a:latin typeface="Pretendard"/>
-                <a:ea typeface="Pretendard"/>
-                <a:cs typeface="Pretendard"/>
-              </a:rPr>
-              <a:t>확인 포인트</a:t>
-            </a:r>
-          </a:p>
-        </p:txBody>
-      </p:sp>
-      <p:sp>
-        <p:nvSpPr>
-          <p:cNvPr id="12" name="Rounded Rectangle 11"/>
-          <p:cNvSpPr/>
-          <p:nvPr/>
-        </p:nvSpPr>
-        <p:spPr>
-          <a:xfrm>
-            <a:off x="1143000" y="3448050"/>
-            <a:ext cx="8763000" cy="647700"/>
+            <a:off x="1143000" y="3924300"/>
+            <a:ext cx="2895600" cy="3143250"/>
           </a:xfrm>
           <a:prstGeom prst="roundRect">
             <a:avLst>
-              <a:gd name="adj" fmla="val 5882"/>
-            </a:avLst>
-          </a:prstGeom>
-          <a:solidFill>
-            <a:srgbClr val="EDF3FD"/>
-          </a:solidFill>
-          <a:ln w="9525">
-            <a:solidFill>
-              <a:srgbClr val="BFD3F5"/>
-            </a:solidFill>
-          </a:ln>
-          <a:effectLst/>
-        </p:spPr>
-        <p:txBody>
-          <a:bodyPr rtlCol="0" anchor="ctr" wrap="square"/>
-          <a:lstStyle/>
-          <a:p>
-            <a:pPr algn="ctr"/>
-          </a:p>
-        </p:txBody>
-      </p:sp>
-      <p:sp>
-        <p:nvSpPr>
-          <p:cNvPr id="13" name="TextBox 12"/>
-          <p:cNvSpPr txBox="1"/>
-          <p:nvPr/>
-        </p:nvSpPr>
-        <p:spPr>
-          <a:xfrm>
-            <a:off x="1238250" y="3448050"/>
-            <a:ext cx="8572500" cy="647700"/>
-          </a:xfrm>
-          <a:prstGeom prst="rect">
-            <a:avLst/>
-          </a:prstGeom>
-          <a:noFill/>
-        </p:spPr>
-        <p:txBody>
-          <a:bodyPr wrap="square" lIns="0" rIns="0" tIns="0" bIns="0" anchor="ctr">
-            <a:spAutoFit/>
-          </a:bodyPr>
-          <a:lstStyle/>
-          <a:p>
-            <a:pPr algn="l">
-              <a:lnSpc>
-                <a:spcPct val="115000"/>
-              </a:lnSpc>
-            </a:pPr>
-            <a:r>
-              <a:rPr sz="1875" b="1">
-                <a:solidFill>
-                  <a:srgbClr val="0D2B5E"/>
-                </a:solidFill>
-                <a:latin typeface="Pretendard"/>
-                <a:ea typeface="Pretendard"/>
-                <a:cs typeface="Pretendard"/>
-              </a:rPr>
-              <a:t>WHERE event_type = 'buy'</a:t>
-            </a:r>
-          </a:p>
-        </p:txBody>
-      </p:sp>
-      <p:sp>
-        <p:nvSpPr>
-          <p:cNvPr id="14" name="Rounded Rectangle 13"/>
-          <p:cNvSpPr/>
-          <p:nvPr/>
-        </p:nvSpPr>
-        <p:spPr>
-          <a:xfrm>
-            <a:off x="9944100" y="3448050"/>
-            <a:ext cx="7200900" cy="647700"/>
-          </a:xfrm>
-          <a:prstGeom prst="roundRect">
-            <a:avLst>
-              <a:gd name="adj" fmla="val 5882"/>
+              <a:gd name="adj" fmla="val 1644"/>
             </a:avLst>
           </a:prstGeom>
           <a:solidFill>
@@ -11586,33 +11410,104 @@
       </p:sp>
       <p:sp>
         <p:nvSpPr>
-          <p:cNvPr id="15" name="TextBox 14"/>
-          <p:cNvSpPr txBox="1"/>
-          <p:nvPr/>
-        </p:nvSpPr>
-        <p:spPr>
-          <a:xfrm>
-            <a:off x="10039350" y="3448050"/>
-            <a:ext cx="7010400" cy="647700"/>
-          </a:xfrm>
-          <a:prstGeom prst="rect">
-            <a:avLst/>
-          </a:prstGeom>
-          <a:noFill/>
-        </p:spPr>
-        <p:txBody>
-          <a:bodyPr wrap="square" lIns="0" rIns="0" tIns="0" bIns="0" anchor="ctr">
+          <p:cNvPr id="10" name="Rectangle 9"/>
+          <p:cNvSpPr/>
+          <p:nvPr/>
+        </p:nvSpPr>
+        <p:spPr>
+          <a:xfrm>
+            <a:off x="1143000" y="3924300"/>
+            <a:ext cx="2895600" cy="914400"/>
+          </a:xfrm>
+          <a:prstGeom prst="rect">
+            <a:avLst/>
+          </a:prstGeom>
+          <a:solidFill>
+            <a:srgbClr val="0D2B5E"/>
+          </a:solidFill>
+          <a:ln>
+            <a:noFill/>
+          </a:ln>
+          <a:effectLst/>
+        </p:spPr>
+        <p:txBody>
+          <a:bodyPr rtlCol="0" anchor="ctr" wrap="square"/>
+          <a:lstStyle/>
+          <a:p>
+            <a:pPr algn="ctr"/>
+          </a:p>
+        </p:txBody>
+      </p:sp>
+      <p:sp>
+        <p:nvSpPr>
+          <p:cNvPr id="11" name="TextBox 10"/>
+          <p:cNvSpPr txBox="1"/>
+          <p:nvPr/>
+        </p:nvSpPr>
+        <p:spPr>
+          <a:xfrm>
+            <a:off x="1143000" y="4171950"/>
+            <a:ext cx="2895600" cy="419100"/>
+          </a:xfrm>
+          <a:prstGeom prst="rect">
+            <a:avLst/>
+          </a:prstGeom>
+          <a:noFill/>
+        </p:spPr>
+        <p:txBody>
+          <a:bodyPr wrap="square" lIns="0" rIns="0" tIns="0" bIns="0" anchor="t">
             <a:spAutoFit/>
           </a:bodyPr>
           <a:lstStyle/>
           <a:p>
             <a:pPr algn="ctr">
               <a:lnSpc>
-                <a:spcPct val="115000"/>
-              </a:lnSpc>
-            </a:pPr>
-            <a:r>
-              <a:rPr sz="1875" b="0">
+                <a:spcPct val="100000"/>
+              </a:lnSpc>
+            </a:pPr>
+            <a:r>
+              <a:rPr sz="2475" b="1">
+                <a:solidFill>
+                  <a:srgbClr val="FFFFFF"/>
+                </a:solidFill>
+                <a:latin typeface="Pretendard"/>
+                <a:ea typeface="Pretendard"/>
+                <a:cs typeface="Pretendard"/>
+              </a:rPr>
+              <a:t>cd ~</a:t>
+            </a:r>
+          </a:p>
+        </p:txBody>
+      </p:sp>
+      <p:sp>
+        <p:nvSpPr>
+          <p:cNvPr id="12" name="TextBox 11"/>
+          <p:cNvSpPr txBox="1"/>
+          <p:nvPr/>
+        </p:nvSpPr>
+        <p:spPr>
+          <a:xfrm>
+            <a:off x="1352550" y="5143500"/>
+            <a:ext cx="2476500" cy="1524000"/>
+          </a:xfrm>
+          <a:prstGeom prst="rect">
+            <a:avLst/>
+          </a:prstGeom>
+          <a:noFill/>
+        </p:spPr>
+        <p:txBody>
+          <a:bodyPr wrap="square" lIns="0" rIns="0" tIns="0" bIns="0" anchor="t">
+            <a:spAutoFit/>
+          </a:bodyPr>
+          <a:lstStyle/>
+          <a:p>
+            <a:pPr algn="ctr">
+              <a:lnSpc>
+                <a:spcPct val="146000"/>
+              </a:lnSpc>
+            </a:pPr>
+            <a:r>
+              <a:rPr sz="2100" b="0">
                 <a:solidFill>
                   <a:srgbClr val="3D3D3D"/>
                 </a:solidFill>
@@ -11620,100 +11515,43 @@
                 <a:ea typeface="Pretendard"/>
                 <a:cs typeface="Pretendard"/>
               </a:rPr>
-              <a:t>5만 건 안팎</a:t>
-            </a:r>
-          </a:p>
-        </p:txBody>
-      </p:sp>
-      <p:sp>
-        <p:nvSpPr>
-          <p:cNvPr id="16" name="Rounded Rectangle 15"/>
+              <a:t>week3 밖으로</a:t>
+            </a:r>
+          </a:p>
+          <a:p>
+            <a:pPr algn="ctr">
+              <a:lnSpc>
+                <a:spcPct val="146000"/>
+              </a:lnSpc>
+            </a:pPr>
+            <a:r>
+              <a:rPr sz="2100" b="0">
+                <a:solidFill>
+                  <a:srgbClr val="3D3D3D"/>
+                </a:solidFill>
+                <a:latin typeface="Pretendard"/>
+                <a:ea typeface="Pretendard"/>
+                <a:cs typeface="Pretendard"/>
+              </a:rPr>
+              <a:t>나간다</a:t>
+            </a:r>
+          </a:p>
+        </p:txBody>
+      </p:sp>
+      <p:sp>
+        <p:nvSpPr>
+          <p:cNvPr id="13" name="Rounded Rectangle 12"/>
           <p:cNvSpPr/>
           <p:nvPr/>
         </p:nvSpPr>
         <p:spPr>
           <a:xfrm>
-            <a:off x="1143000" y="4171950"/>
-            <a:ext cx="8763000" cy="647700"/>
+            <a:off x="4419600" y="3924300"/>
+            <a:ext cx="2895600" cy="3143250"/>
           </a:xfrm>
           <a:prstGeom prst="roundRect">
             <a:avLst>
-              <a:gd name="adj" fmla="val 5882"/>
-            </a:avLst>
-          </a:prstGeom>
-          <a:solidFill>
-            <a:srgbClr val="EDF3FD"/>
-          </a:solidFill>
-          <a:ln w="9525">
-            <a:solidFill>
-              <a:srgbClr val="BFD3F5"/>
-            </a:solidFill>
-          </a:ln>
-          <a:effectLst/>
-        </p:spPr>
-        <p:txBody>
-          <a:bodyPr rtlCol="0" anchor="ctr" wrap="square"/>
-          <a:lstStyle/>
-          <a:p>
-            <a:pPr algn="ctr"/>
-          </a:p>
-        </p:txBody>
-      </p:sp>
-      <p:sp>
-        <p:nvSpPr>
-          <p:cNvPr id="17" name="TextBox 16"/>
-          <p:cNvSpPr txBox="1"/>
-          <p:nvPr/>
-        </p:nvSpPr>
-        <p:spPr>
-          <a:xfrm>
-            <a:off x="1238250" y="4171950"/>
-            <a:ext cx="8572500" cy="647700"/>
-          </a:xfrm>
-          <a:prstGeom prst="rect">
-            <a:avLst/>
-          </a:prstGeom>
-          <a:noFill/>
-        </p:spPr>
-        <p:txBody>
-          <a:bodyPr wrap="square" lIns="0" rIns="0" tIns="0" bIns="0" anchor="ctr">
-            <a:spAutoFit/>
-          </a:bodyPr>
-          <a:lstStyle/>
-          <a:p>
-            <a:pPr algn="l">
-              <a:lnSpc>
-                <a:spcPct val="115000"/>
-              </a:lnSpc>
-            </a:pPr>
-            <a:r>
-              <a:rPr sz="1875" b="1">
-                <a:solidFill>
-                  <a:srgbClr val="0D2B5E"/>
-                </a:solidFill>
-                <a:latin typeface="Pretendard"/>
-                <a:ea typeface="Pretendard"/>
-                <a:cs typeface="Pretendard"/>
-              </a:rPr>
-              <a:t>WITH daily AS (… date_trunc('day', ts) …)</a:t>
-            </a:r>
-          </a:p>
-        </p:txBody>
-      </p:sp>
-      <p:sp>
-        <p:nvSpPr>
-          <p:cNvPr id="18" name="Rounded Rectangle 17"/>
-          <p:cNvSpPr/>
-          <p:nvPr/>
-        </p:nvSpPr>
-        <p:spPr>
-          <a:xfrm>
-            <a:off x="9944100" y="4171950"/>
-            <a:ext cx="7200900" cy="647700"/>
-          </a:xfrm>
-          <a:prstGeom prst="roundRect">
-            <a:avLst>
-              <a:gd name="adj" fmla="val 5882"/>
+              <a:gd name="adj" fmla="val 1644"/>
             </a:avLst>
           </a:prstGeom>
           <a:solidFill>
@@ -11736,33 +11574,104 @@
       </p:sp>
       <p:sp>
         <p:nvSpPr>
-          <p:cNvPr id="19" name="TextBox 18"/>
-          <p:cNvSpPr txBox="1"/>
-          <p:nvPr/>
-        </p:nvSpPr>
-        <p:spPr>
-          <a:xfrm>
-            <a:off x="10039350" y="4171950"/>
-            <a:ext cx="7010400" cy="647700"/>
-          </a:xfrm>
-          <a:prstGeom prst="rect">
-            <a:avLst/>
-          </a:prstGeom>
-          <a:noFill/>
-        </p:spPr>
-        <p:txBody>
-          <a:bodyPr wrap="square" lIns="0" rIns="0" tIns="0" bIns="0" anchor="ctr">
+          <p:cNvPr id="14" name="Rectangle 13"/>
+          <p:cNvSpPr/>
+          <p:nvPr/>
+        </p:nvSpPr>
+        <p:spPr>
+          <a:xfrm>
+            <a:off x="4419600" y="3924300"/>
+            <a:ext cx="2895600" cy="914400"/>
+          </a:xfrm>
+          <a:prstGeom prst="rect">
+            <a:avLst/>
+          </a:prstGeom>
+          <a:solidFill>
+            <a:srgbClr val="1E5BC6"/>
+          </a:solidFill>
+          <a:ln>
+            <a:noFill/>
+          </a:ln>
+          <a:effectLst/>
+        </p:spPr>
+        <p:txBody>
+          <a:bodyPr rtlCol="0" anchor="ctr" wrap="square"/>
+          <a:lstStyle/>
+          <a:p>
+            <a:pPr algn="ctr"/>
+          </a:p>
+        </p:txBody>
+      </p:sp>
+      <p:sp>
+        <p:nvSpPr>
+          <p:cNvPr id="15" name="TextBox 14"/>
+          <p:cNvSpPr txBox="1"/>
+          <p:nvPr/>
+        </p:nvSpPr>
+        <p:spPr>
+          <a:xfrm>
+            <a:off x="4419600" y="4171950"/>
+            <a:ext cx="2895600" cy="419100"/>
+          </a:xfrm>
+          <a:prstGeom prst="rect">
+            <a:avLst/>
+          </a:prstGeom>
+          <a:noFill/>
+        </p:spPr>
+        <p:txBody>
+          <a:bodyPr wrap="square" lIns="0" rIns="0" tIns="0" bIns="0" anchor="t">
             <a:spAutoFit/>
           </a:bodyPr>
           <a:lstStyle/>
           <a:p>
             <a:pPr algn="ctr">
               <a:lnSpc>
-                <a:spcPct val="115000"/>
-              </a:lnSpc>
-            </a:pPr>
-            <a:r>
-              <a:rPr sz="1875" b="0">
+                <a:spcPct val="100000"/>
+              </a:lnSpc>
+            </a:pPr>
+            <a:r>
+              <a:rPr sz="2475" b="1">
+                <a:solidFill>
+                  <a:srgbClr val="FFFFFF"/>
+                </a:solidFill>
+                <a:latin typeface="Pretendard"/>
+                <a:ea typeface="Pretendard"/>
+                <a:cs typeface="Pretendard"/>
+              </a:rPr>
+              <a:t>다른 폴더에서 실행</a:t>
+            </a:r>
+          </a:p>
+        </p:txBody>
+      </p:sp>
+      <p:sp>
+        <p:nvSpPr>
+          <p:cNvPr id="16" name="TextBox 15"/>
+          <p:cNvSpPr txBox="1"/>
+          <p:nvPr/>
+        </p:nvSpPr>
+        <p:spPr>
+          <a:xfrm>
+            <a:off x="4629150" y="5143500"/>
+            <a:ext cx="2476500" cy="1524000"/>
+          </a:xfrm>
+          <a:prstGeom prst="rect">
+            <a:avLst/>
+          </a:prstGeom>
+          <a:noFill/>
+        </p:spPr>
+        <p:txBody>
+          <a:bodyPr wrap="square" lIns="0" rIns="0" tIns="0" bIns="0" anchor="t">
+            <a:spAutoFit/>
+          </a:bodyPr>
+          <a:lstStyle/>
+          <a:p>
+            <a:pPr algn="ctr">
+              <a:lnSpc>
+                <a:spcPct val="146000"/>
+              </a:lnSpc>
+            </a:pPr>
+            <a:r>
+              <a:rPr sz="2100" b="0">
                 <a:solidFill>
                   <a:srgbClr val="3D3D3D"/>
                 </a:solidFill>
@@ -11770,100 +11679,43 @@
                 <a:ea typeface="Pretendard"/>
                 <a:cs typeface="Pretendard"/>
               </a:rPr>
-              <a:t>CTE 가 그대로 동작</a:t>
-            </a:r>
-          </a:p>
-        </p:txBody>
-      </p:sp>
-      <p:sp>
-        <p:nvSpPr>
-          <p:cNvPr id="20" name="Rounded Rectangle 19"/>
+              <a:t>python3 ~/data-eng/</a:t>
+            </a:r>
+          </a:p>
+          <a:p>
+            <a:pPr algn="ctr">
+              <a:lnSpc>
+                <a:spcPct val="146000"/>
+              </a:lnSpc>
+            </a:pPr>
+            <a:r>
+              <a:rPr sz="2100" b="0">
+                <a:solidFill>
+                  <a:srgbClr val="3D3D3D"/>
+                </a:solidFill>
+                <a:latin typeface="Pretendard"/>
+                <a:ea typeface="Pretendard"/>
+                <a:cs typeface="Pretendard"/>
+              </a:rPr>
+              <a:t>week3/query.py</a:t>
+            </a:r>
+          </a:p>
+        </p:txBody>
+      </p:sp>
+      <p:sp>
+        <p:nvSpPr>
+          <p:cNvPr id="17" name="Rounded Rectangle 16"/>
           <p:cNvSpPr/>
           <p:nvPr/>
         </p:nvSpPr>
         <p:spPr>
           <a:xfrm>
-            <a:off x="1143000" y="4895850"/>
-            <a:ext cx="8763000" cy="647700"/>
+            <a:off x="7696200" y="3924300"/>
+            <a:ext cx="2895600" cy="3143250"/>
           </a:xfrm>
           <a:prstGeom prst="roundRect">
             <a:avLst>
-              <a:gd name="adj" fmla="val 5882"/>
-            </a:avLst>
-          </a:prstGeom>
-          <a:solidFill>
-            <a:srgbClr val="EDF3FD"/>
-          </a:solidFill>
-          <a:ln w="9525">
-            <a:solidFill>
-              <a:srgbClr val="BFD3F5"/>
-            </a:solidFill>
-          </a:ln>
-          <a:effectLst/>
-        </p:spPr>
-        <p:txBody>
-          <a:bodyPr rtlCol="0" anchor="ctr" wrap="square"/>
-          <a:lstStyle/>
-          <a:p>
-            <a:pPr algn="ctr"/>
-          </a:p>
-        </p:txBody>
-      </p:sp>
-      <p:sp>
-        <p:nvSpPr>
-          <p:cNvPr id="21" name="TextBox 20"/>
-          <p:cNvSpPr txBox="1"/>
-          <p:nvPr/>
-        </p:nvSpPr>
-        <p:spPr>
-          <a:xfrm>
-            <a:off x="1238250" y="4895850"/>
-            <a:ext cx="8572500" cy="647700"/>
-          </a:xfrm>
-          <a:prstGeom prst="rect">
-            <a:avLst/>
-          </a:prstGeom>
-          <a:noFill/>
-        </p:spPr>
-        <p:txBody>
-          <a:bodyPr wrap="square" lIns="0" rIns="0" tIns="0" bIns="0" anchor="ctr">
-            <a:spAutoFit/>
-          </a:bodyPr>
-          <a:lstStyle/>
-          <a:p>
-            <a:pPr algn="l">
-              <a:lnSpc>
-                <a:spcPct val="115000"/>
-              </a:lnSpc>
-            </a:pPr>
-            <a:r>
-              <a:rPr sz="1875" b="1">
-                <a:solidFill>
-                  <a:srgbClr val="0D2B5E"/>
-                </a:solidFill>
-                <a:latin typeface="Pretendard"/>
-                <a:ea typeface="Pretendard"/>
-                <a:cs typeface="Pretendard"/>
-              </a:rPr>
-              <a:t>sum(total) OVER (PARTITION BY … ORDER BY d)</a:t>
-            </a:r>
-          </a:p>
-        </p:txBody>
-      </p:sp>
-      <p:sp>
-        <p:nvSpPr>
-          <p:cNvPr id="22" name="Rounded Rectangle 21"/>
-          <p:cNvSpPr/>
-          <p:nvPr/>
-        </p:nvSpPr>
-        <p:spPr>
-          <a:xfrm>
-            <a:off x="9944100" y="4895850"/>
-            <a:ext cx="7200900" cy="647700"/>
-          </a:xfrm>
-          <a:prstGeom prst="roundRect">
-            <a:avLst>
-              <a:gd name="adj" fmla="val 5882"/>
+              <a:gd name="adj" fmla="val 1644"/>
             </a:avLst>
           </a:prstGeom>
           <a:solidFill>
@@ -11886,33 +11738,104 @@
       </p:sp>
       <p:sp>
         <p:nvSpPr>
-          <p:cNvPr id="23" name="TextBox 22"/>
-          <p:cNvSpPr txBox="1"/>
-          <p:nvPr/>
-        </p:nvSpPr>
-        <p:spPr>
-          <a:xfrm>
-            <a:off x="10039350" y="4895850"/>
-            <a:ext cx="7010400" cy="647700"/>
-          </a:xfrm>
-          <a:prstGeom prst="rect">
-            <a:avLst/>
-          </a:prstGeom>
-          <a:noFill/>
-        </p:spPr>
-        <p:txBody>
-          <a:bodyPr wrap="square" lIns="0" rIns="0" tIns="0" bIns="0" anchor="ctr">
+          <p:cNvPr id="18" name="Rectangle 17"/>
+          <p:cNvSpPr/>
+          <p:nvPr/>
+        </p:nvSpPr>
+        <p:spPr>
+          <a:xfrm>
+            <a:off x="7696200" y="3924300"/>
+            <a:ext cx="2895600" cy="914400"/>
+          </a:xfrm>
+          <a:prstGeom prst="rect">
+            <a:avLst/>
+          </a:prstGeom>
+          <a:solidFill>
+            <a:srgbClr val="0D2B5E"/>
+          </a:solidFill>
+          <a:ln>
+            <a:noFill/>
+          </a:ln>
+          <a:effectLst/>
+        </p:spPr>
+        <p:txBody>
+          <a:bodyPr rtlCol="0" anchor="ctr" wrap="square"/>
+          <a:lstStyle/>
+          <a:p>
+            <a:pPr algn="ctr"/>
+          </a:p>
+        </p:txBody>
+      </p:sp>
+      <p:sp>
+        <p:nvSpPr>
+          <p:cNvPr id="19" name="TextBox 18"/>
+          <p:cNvSpPr txBox="1"/>
+          <p:nvPr/>
+        </p:nvSpPr>
+        <p:spPr>
+          <a:xfrm>
+            <a:off x="7696200" y="4171950"/>
+            <a:ext cx="2895600" cy="419100"/>
+          </a:xfrm>
+          <a:prstGeom prst="rect">
+            <a:avLst/>
+          </a:prstGeom>
+          <a:noFill/>
+        </p:spPr>
+        <p:txBody>
+          <a:bodyPr wrap="square" lIns="0" rIns="0" tIns="0" bIns="0" anchor="t">
             <a:spAutoFit/>
           </a:bodyPr>
           <a:lstStyle/>
           <a:p>
             <a:pPr algn="ctr">
               <a:lnSpc>
-                <a:spcPct val="115000"/>
-              </a:lnSpc>
-            </a:pPr>
-            <a:r>
-              <a:rPr sz="1875" b="0">
+                <a:spcPct val="100000"/>
+              </a:lnSpc>
+            </a:pPr>
+            <a:r>
+              <a:rPr sz="2475" b="1">
+                <a:solidFill>
+                  <a:srgbClr val="FFFFFF"/>
+                </a:solidFill>
+                <a:latin typeface="Pretendard"/>
+                <a:ea typeface="Pretendard"/>
+                <a:cs typeface="Pretendard"/>
+              </a:rPr>
+              <a:t>IO Error</a:t>
+            </a:r>
+          </a:p>
+        </p:txBody>
+      </p:sp>
+      <p:sp>
+        <p:nvSpPr>
+          <p:cNvPr id="20" name="TextBox 19"/>
+          <p:cNvSpPr txBox="1"/>
+          <p:nvPr/>
+        </p:nvSpPr>
+        <p:spPr>
+          <a:xfrm>
+            <a:off x="7905750" y="5143500"/>
+            <a:ext cx="2476500" cy="1524000"/>
+          </a:xfrm>
+          <a:prstGeom prst="rect">
+            <a:avLst/>
+          </a:prstGeom>
+          <a:noFill/>
+        </p:spPr>
+        <p:txBody>
+          <a:bodyPr wrap="square" lIns="0" rIns="0" tIns="0" bIns="0" anchor="t">
+            <a:spAutoFit/>
+          </a:bodyPr>
+          <a:lstStyle/>
+          <a:p>
+            <a:pPr algn="ctr">
+              <a:lnSpc>
+                <a:spcPct val="146000"/>
+              </a:lnSpc>
+            </a:pPr>
+            <a:r>
+              <a:rPr sz="2100" b="0">
                 <a:solidFill>
                   <a:srgbClr val="3D3D3D"/>
                 </a:solidFill>
@@ -11920,100 +11843,43 @@
                 <a:ea typeface="Pretendard"/>
                 <a:cs typeface="Pretendard"/>
               </a:rPr>
-              <a:t>Window Function 도 그대로</a:t>
-            </a:r>
-          </a:p>
-        </p:txBody>
-      </p:sp>
-      <p:sp>
-        <p:nvSpPr>
-          <p:cNvPr id="24" name="Rounded Rectangle 23"/>
+              <a:t>No files found that</a:t>
+            </a:r>
+          </a:p>
+          <a:p>
+            <a:pPr algn="ctr">
+              <a:lnSpc>
+                <a:spcPct val="146000"/>
+              </a:lnSpc>
+            </a:pPr>
+            <a:r>
+              <a:rPr sz="2100" b="0">
+                <a:solidFill>
+                  <a:srgbClr val="3D3D3D"/>
+                </a:solidFill>
+                <a:latin typeface="Pretendard"/>
+                <a:ea typeface="Pretendard"/>
+                <a:cs typeface="Pretendard"/>
+              </a:rPr>
+              <a:t>match the pattern</a:t>
+            </a:r>
+          </a:p>
+        </p:txBody>
+      </p:sp>
+      <p:sp>
+        <p:nvSpPr>
+          <p:cNvPr id="21" name="Rounded Rectangle 20"/>
           <p:cNvSpPr/>
           <p:nvPr/>
         </p:nvSpPr>
         <p:spPr>
           <a:xfrm>
-            <a:off x="1143000" y="5619750"/>
-            <a:ext cx="8763000" cy="647700"/>
+            <a:off x="10972800" y="3924300"/>
+            <a:ext cx="2895600" cy="3143250"/>
           </a:xfrm>
           <a:prstGeom prst="roundRect">
             <a:avLst>
-              <a:gd name="adj" fmla="val 5882"/>
-            </a:avLst>
-          </a:prstGeom>
-          <a:solidFill>
-            <a:srgbClr val="EDF3FD"/>
-          </a:solidFill>
-          <a:ln w="9525">
-            <a:solidFill>
-              <a:srgbClr val="BFD3F5"/>
-            </a:solidFill>
-          </a:ln>
-          <a:effectLst/>
-        </p:spPr>
-        <p:txBody>
-          <a:bodyPr rtlCol="0" anchor="ctr" wrap="square"/>
-          <a:lstStyle/>
-          <a:p>
-            <a:pPr algn="ctr"/>
-          </a:p>
-        </p:txBody>
-      </p:sp>
-      <p:sp>
-        <p:nvSpPr>
-          <p:cNvPr id="25" name="TextBox 24"/>
-          <p:cNvSpPr txBox="1"/>
-          <p:nvPr/>
-        </p:nvSpPr>
-        <p:spPr>
-          <a:xfrm>
-            <a:off x="1238250" y="5619750"/>
-            <a:ext cx="8572500" cy="647700"/>
-          </a:xfrm>
-          <a:prstGeom prst="rect">
-            <a:avLst/>
-          </a:prstGeom>
-          <a:noFill/>
-        </p:spPr>
-        <p:txBody>
-          <a:bodyPr wrap="square" lIns="0" rIns="0" tIns="0" bIns="0" anchor="ctr">
-            <a:spAutoFit/>
-          </a:bodyPr>
-          <a:lstStyle/>
-          <a:p>
-            <a:pPr algn="l">
-              <a:lnSpc>
-                <a:spcPct val="115000"/>
-              </a:lnSpc>
-            </a:pPr>
-            <a:r>
-              <a:rPr sz="1875" b="1">
-                <a:solidFill>
-                  <a:srgbClr val="0D2B5E"/>
-                </a:solidFill>
-                <a:latin typeface="Pretendard"/>
-                <a:ea typeface="Pretendard"/>
-                <a:cs typeface="Pretendard"/>
-              </a:rPr>
-              <a:t>GROUP BY 1, 2</a:t>
-            </a:r>
-          </a:p>
-        </p:txBody>
-      </p:sp>
-      <p:sp>
-        <p:nvSpPr>
-          <p:cNvPr id="26" name="Rounded Rectangle 25"/>
-          <p:cNvSpPr/>
-          <p:nvPr/>
-        </p:nvSpPr>
-        <p:spPr>
-          <a:xfrm>
-            <a:off x="9944100" y="5619750"/>
-            <a:ext cx="7200900" cy="647700"/>
-          </a:xfrm>
-          <a:prstGeom prst="roundRect">
-            <a:avLst>
-              <a:gd name="adj" fmla="val 5882"/>
+              <a:gd name="adj" fmla="val 1644"/>
             </a:avLst>
           </a:prstGeom>
           <a:solidFill>
@@ -12036,33 +11902,268 @@
       </p:sp>
       <p:sp>
         <p:nvSpPr>
+          <p:cNvPr id="22" name="Rectangle 21"/>
+          <p:cNvSpPr/>
+          <p:nvPr/>
+        </p:nvSpPr>
+        <p:spPr>
+          <a:xfrm>
+            <a:off x="10972800" y="3924300"/>
+            <a:ext cx="2895600" cy="914400"/>
+          </a:xfrm>
+          <a:prstGeom prst="rect">
+            <a:avLst/>
+          </a:prstGeom>
+          <a:solidFill>
+            <a:srgbClr val="1E5BC6"/>
+          </a:solidFill>
+          <a:ln>
+            <a:noFill/>
+          </a:ln>
+          <a:effectLst/>
+        </p:spPr>
+        <p:txBody>
+          <a:bodyPr rtlCol="0" anchor="ctr" wrap="square"/>
+          <a:lstStyle/>
+          <a:p>
+            <a:pPr algn="ctr"/>
+          </a:p>
+        </p:txBody>
+      </p:sp>
+      <p:sp>
+        <p:nvSpPr>
+          <p:cNvPr id="23" name="TextBox 22"/>
+          <p:cNvSpPr txBox="1"/>
+          <p:nvPr/>
+        </p:nvSpPr>
+        <p:spPr>
+          <a:xfrm>
+            <a:off x="10972800" y="4171950"/>
+            <a:ext cx="2895600" cy="419100"/>
+          </a:xfrm>
+          <a:prstGeom prst="rect">
+            <a:avLst/>
+          </a:prstGeom>
+          <a:noFill/>
+        </p:spPr>
+        <p:txBody>
+          <a:bodyPr wrap="square" lIns="0" rIns="0" tIns="0" bIns="0" anchor="t">
+            <a:spAutoFit/>
+          </a:bodyPr>
+          <a:lstStyle/>
+          <a:p>
+            <a:pPr algn="ctr">
+              <a:lnSpc>
+                <a:spcPct val="100000"/>
+              </a:lnSpc>
+            </a:pPr>
+            <a:r>
+              <a:rPr sz="2475" b="1">
+                <a:solidFill>
+                  <a:srgbClr val="FFFFFF"/>
+                </a:solidFill>
+                <a:latin typeface="Pretendard"/>
+                <a:ea typeface="Pretendard"/>
+                <a:cs typeface="Pretendard"/>
+              </a:rPr>
+              <a:t>왜?</a:t>
+            </a:r>
+          </a:p>
+        </p:txBody>
+      </p:sp>
+      <p:sp>
+        <p:nvSpPr>
+          <p:cNvPr id="24" name="TextBox 23"/>
+          <p:cNvSpPr txBox="1"/>
+          <p:nvPr/>
+        </p:nvSpPr>
+        <p:spPr>
+          <a:xfrm>
+            <a:off x="11182350" y="5143500"/>
+            <a:ext cx="2476500" cy="1524000"/>
+          </a:xfrm>
+          <a:prstGeom prst="rect">
+            <a:avLst/>
+          </a:prstGeom>
+          <a:noFill/>
+        </p:spPr>
+        <p:txBody>
+          <a:bodyPr wrap="square" lIns="0" rIns="0" tIns="0" bIns="0" anchor="t">
+            <a:spAutoFit/>
+          </a:bodyPr>
+          <a:lstStyle/>
+          <a:p>
+            <a:pPr algn="ctr">
+              <a:lnSpc>
+                <a:spcPct val="146000"/>
+              </a:lnSpc>
+            </a:pPr>
+            <a:r>
+              <a:rPr sz="2100" b="0">
+                <a:solidFill>
+                  <a:srgbClr val="3D3D3D"/>
+                </a:solidFill>
+                <a:latin typeface="Pretendard"/>
+                <a:ea typeface="Pretendard"/>
+                <a:cs typeface="Pretendard"/>
+              </a:rPr>
+              <a:t>'events.csv' 를</a:t>
+            </a:r>
+          </a:p>
+          <a:p>
+            <a:pPr algn="ctr">
+              <a:lnSpc>
+                <a:spcPct val="146000"/>
+              </a:lnSpc>
+            </a:pPr>
+            <a:r>
+              <a:rPr sz="2100" b="0">
+                <a:solidFill>
+                  <a:srgbClr val="3D3D3D"/>
+                </a:solidFill>
+                <a:latin typeface="Pretendard"/>
+                <a:ea typeface="Pretendard"/>
+                <a:cs typeface="Pretendard"/>
+              </a:rPr>
+              <a:t>~ 에서 찾았다</a:t>
+            </a:r>
+          </a:p>
+        </p:txBody>
+      </p:sp>
+      <p:sp>
+        <p:nvSpPr>
+          <p:cNvPr id="25" name="Rounded Rectangle 24"/>
+          <p:cNvSpPr/>
+          <p:nvPr/>
+        </p:nvSpPr>
+        <p:spPr>
+          <a:xfrm>
+            <a:off x="14249400" y="3924300"/>
+            <a:ext cx="2895600" cy="3143250"/>
+          </a:xfrm>
+          <a:prstGeom prst="roundRect">
+            <a:avLst>
+              <a:gd name="adj" fmla="val 1644"/>
+            </a:avLst>
+          </a:prstGeom>
+          <a:solidFill>
+            <a:srgbClr val="FAFBFD"/>
+          </a:solidFill>
+          <a:ln w="9525">
+            <a:solidFill>
+              <a:srgbClr val="DCE1E8"/>
+            </a:solidFill>
+          </a:ln>
+          <a:effectLst/>
+        </p:spPr>
+        <p:txBody>
+          <a:bodyPr rtlCol="0" anchor="ctr" wrap="square"/>
+          <a:lstStyle/>
+          <a:p>
+            <a:pPr algn="ctr"/>
+          </a:p>
+        </p:txBody>
+      </p:sp>
+      <p:sp>
+        <p:nvSpPr>
+          <p:cNvPr id="26" name="Rectangle 25"/>
+          <p:cNvSpPr/>
+          <p:nvPr/>
+        </p:nvSpPr>
+        <p:spPr>
+          <a:xfrm>
+            <a:off x="14249400" y="3924300"/>
+            <a:ext cx="2895600" cy="914400"/>
+          </a:xfrm>
+          <a:prstGeom prst="rect">
+            <a:avLst/>
+          </a:prstGeom>
+          <a:solidFill>
+            <a:srgbClr val="0D2B5E"/>
+          </a:solidFill>
+          <a:ln>
+            <a:noFill/>
+          </a:ln>
+          <a:effectLst/>
+        </p:spPr>
+        <p:txBody>
+          <a:bodyPr rtlCol="0" anchor="ctr" wrap="square"/>
+          <a:lstStyle/>
+          <a:p>
+            <a:pPr algn="ctr"/>
+          </a:p>
+        </p:txBody>
+      </p:sp>
+      <p:sp>
+        <p:nvSpPr>
           <p:cNvPr id="27" name="TextBox 26"/>
           <p:cNvSpPr txBox="1"/>
           <p:nvPr/>
         </p:nvSpPr>
         <p:spPr>
           <a:xfrm>
-            <a:off x="10039350" y="5619750"/>
-            <a:ext cx="7010400" cy="647700"/>
-          </a:xfrm>
-          <a:prstGeom prst="rect">
-            <a:avLst/>
-          </a:prstGeom>
-          <a:noFill/>
-        </p:spPr>
-        <p:txBody>
-          <a:bodyPr wrap="square" lIns="0" rIns="0" tIns="0" bIns="0" anchor="ctr">
+            <a:off x="14249400" y="4171950"/>
+            <a:ext cx="2895600" cy="419100"/>
+          </a:xfrm>
+          <a:prstGeom prst="rect">
+            <a:avLst/>
+          </a:prstGeom>
+          <a:noFill/>
+        </p:spPr>
+        <p:txBody>
+          <a:bodyPr wrap="square" lIns="0" rIns="0" tIns="0" bIns="0" anchor="t">
             <a:spAutoFit/>
           </a:bodyPr>
           <a:lstStyle/>
           <a:p>
             <a:pPr algn="ctr">
               <a:lnSpc>
-                <a:spcPct val="115000"/>
-              </a:lnSpc>
-            </a:pPr>
-            <a:r>
-              <a:rPr sz="1875" b="0">
+                <a:spcPct val="100000"/>
+              </a:lnSpc>
+            </a:pPr>
+            <a:r>
+              <a:rPr sz="2475" b="1">
+                <a:solidFill>
+                  <a:srgbClr val="FFFFFF"/>
+                </a:solidFill>
+                <a:latin typeface="Pretendard"/>
+                <a:ea typeface="Pretendard"/>
+                <a:cs typeface="Pretendard"/>
+              </a:rPr>
+              <a:t>week3 로 복귀</a:t>
+            </a:r>
+          </a:p>
+        </p:txBody>
+      </p:sp>
+      <p:sp>
+        <p:nvSpPr>
+          <p:cNvPr id="28" name="TextBox 27"/>
+          <p:cNvSpPr txBox="1"/>
+          <p:nvPr/>
+        </p:nvSpPr>
+        <p:spPr>
+          <a:xfrm>
+            <a:off x="14458950" y="5143500"/>
+            <a:ext cx="2476500" cy="1524000"/>
+          </a:xfrm>
+          <a:prstGeom prst="rect">
+            <a:avLst/>
+          </a:prstGeom>
+          <a:noFill/>
+        </p:spPr>
+        <p:txBody>
+          <a:bodyPr wrap="square" lIns="0" rIns="0" tIns="0" bIns="0" anchor="t">
+            <a:spAutoFit/>
+          </a:bodyPr>
+          <a:lstStyle/>
+          <a:p>
+            <a:pPr algn="ctr">
+              <a:lnSpc>
+                <a:spcPct val="146000"/>
+              </a:lnSpc>
+            </a:pPr>
+            <a:r>
+              <a:rPr sz="2100" b="0">
                 <a:solidFill>
                   <a:srgbClr val="3D3D3D"/>
                 </a:solidFill>
@@ -12070,48 +12171,25 @@
                 <a:ea typeface="Pretendard"/>
                 <a:cs typeface="Pretendard"/>
               </a:rPr>
-              <a:t>식이 길 때 반복을 줄인다</a:t>
-            </a:r>
-          </a:p>
-        </p:txBody>
-      </p:sp>
-      <p:sp>
-        <p:nvSpPr>
-          <p:cNvPr id="28" name="TextBox 27"/>
-          <p:cNvSpPr txBox="1"/>
-          <p:nvPr/>
-        </p:nvSpPr>
-        <p:spPr>
-          <a:xfrm>
-            <a:off x="1143000" y="7620000"/>
-            <a:ext cx="16002000" cy="342900"/>
-          </a:xfrm>
-          <a:prstGeom prst="rect">
-            <a:avLst/>
-          </a:prstGeom>
-          <a:noFill/>
-        </p:spPr>
-        <p:txBody>
-          <a:bodyPr wrap="square" lIns="0" rIns="0" tIns="0" bIns="0" anchor="t">
-            <a:spAutoFit/>
-          </a:bodyPr>
-          <a:lstStyle/>
-          <a:p>
-            <a:pPr algn="l">
-              <a:lnSpc>
-                <a:spcPct val="100000"/>
-              </a:lnSpc>
-            </a:pPr>
-            <a:r>
-              <a:rPr sz="1875" b="1">
-                <a:solidFill>
-                  <a:srgbClr val="7D7D7D"/>
-                </a:solidFill>
-                <a:latin typeface="Pretendard"/>
-                <a:ea typeface="Pretendard"/>
-                <a:cs typeface="Pretendard"/>
-              </a:rPr>
-              <a:t>GROUP BY 1, 2 는 「SELECT 의 첫째·둘째 식으로 묶어라」 — DuckDB·PostgreSQL·MySQL 모두 되는 문법</a:t>
+              <a:t>cd 로 돌아오면 다시</a:t>
+            </a:r>
+          </a:p>
+          <a:p>
+            <a:pPr algn="ctr">
+              <a:lnSpc>
+                <a:spcPct val="146000"/>
+              </a:lnSpc>
+            </a:pPr>
+            <a:r>
+              <a:rPr sz="2100" b="0">
+                <a:solidFill>
+                  <a:srgbClr val="3D3D3D"/>
+                </a:solidFill>
+                <a:latin typeface="Pretendard"/>
+                <a:ea typeface="Pretendard"/>
+                <a:cs typeface="Pretendard"/>
+              </a:rPr>
+              <a:t>이 오류엔 pwd 부터</a:t>
             </a:r>
           </a:p>
         </p:txBody>
@@ -12248,7 +12326,7 @@
       <p:grpSpPr/>
       <p:sp>
         <p:nvSpPr>
-          <p:cNvPr id="2" name="Oval 1"/>
+          <p:cNvPr id="2" name="deckgen:decor"/>
           <p:cNvSpPr/>
           <p:nvPr/>
         </p:nvSpPr>
@@ -12278,7 +12356,7 @@
       </p:sp>
       <p:sp>
         <p:nvSpPr>
-          <p:cNvPr id="3" name="Oval 2"/>
+          <p:cNvPr id="3" name="deckgen:decor"/>
           <p:cNvSpPr/>
           <p:nvPr/>
         </p:nvSpPr>
@@ -12308,7 +12386,7 @@
       </p:sp>
       <p:sp>
         <p:nvSpPr>
-          <p:cNvPr id="4" name="Oval 3"/>
+          <p:cNvPr id="4" name="deckgen:decor"/>
           <p:cNvSpPr/>
           <p:nvPr/>
         </p:nvSpPr>
@@ -12372,7 +12450,7 @@
                 <a:ea typeface="Pretendard"/>
                 <a:cs typeface="Pretendard"/>
               </a:rPr>
-              <a:t>일부러 실패시키기</a:t>
+              <a:t>5단계</a:t>
             </a:r>
           </a:p>
         </p:txBody>
@@ -12413,7 +12491,7 @@
                 <a:ea typeface="Pretendard"/>
                 <a:cs typeface="Pretendard"/>
               </a:rPr>
-              <a:t>다른 폴더에서 같은 질의 — IO Error 를 직접 본다</a:t>
+              <a:t>조건과 집계 — 2-2 에서 배운 SQL 이 그대로 통한다</a:t>
             </a:r>
           </a:p>
         </p:txBody>
@@ -12450,59 +12528,235 @@
       </p:sp>
       <p:sp>
         <p:nvSpPr>
-          <p:cNvPr id="8" name="TextBox 7"/>
-          <p:cNvSpPr txBox="1"/>
-          <p:nvPr/>
-        </p:nvSpPr>
-        <p:spPr>
-          <a:xfrm>
-            <a:off x="1143000" y="3067050"/>
-            <a:ext cx="16002000" cy="438150"/>
-          </a:xfrm>
-          <a:prstGeom prst="rect">
-            <a:avLst/>
-          </a:prstGeom>
-          <a:noFill/>
-        </p:spPr>
-        <p:txBody>
-          <a:bodyPr wrap="square" lIns="0" rIns="0" tIns="0" bIns="0" anchor="t">
-            <a:spAutoFit/>
-          </a:bodyPr>
-          <a:lstStyle/>
-          <a:p>
-            <a:pPr algn="l">
-              <a:lnSpc>
-                <a:spcPct val="130000"/>
-              </a:lnSpc>
-            </a:pPr>
-            <a:r>
-              <a:rPr sz="2550" b="1">
-                <a:solidFill>
-                  <a:srgbClr val="3D3D3D"/>
-                </a:solidFill>
-                <a:latin typeface="Pretendard"/>
-                <a:ea typeface="Pretendard"/>
-                <a:cs typeface="Pretendard"/>
-              </a:rPr>
-              <a:t>오늘 가장 많이 만날 오류입니다 — 경로가 「실행되는 폴더」 기준이라는 것을 몸으로 확인</a:t>
-            </a:r>
-          </a:p>
-        </p:txBody>
-      </p:sp>
-      <p:sp>
-        <p:nvSpPr>
-          <p:cNvPr id="9" name="Rounded Rectangle 8"/>
+          <p:cNvPr id="8" name="Rectangle 7"/>
           <p:cNvSpPr/>
           <p:nvPr/>
         </p:nvSpPr>
         <p:spPr>
           <a:xfrm>
-            <a:off x="1143000" y="3924300"/>
-            <a:ext cx="2895600" cy="3143250"/>
+            <a:off x="1143000" y="2781300"/>
+            <a:ext cx="8763000" cy="590550"/>
+          </a:xfrm>
+          <a:prstGeom prst="rect">
+            <a:avLst/>
+          </a:prstGeom>
+          <a:solidFill>
+            <a:srgbClr val="0D2B5E"/>
+          </a:solidFill>
+          <a:ln>
+            <a:noFill/>
+          </a:ln>
+          <a:effectLst/>
+        </p:spPr>
+        <p:txBody>
+          <a:bodyPr rtlCol="0" anchor="ctr" wrap="square"/>
+          <a:lstStyle/>
+          <a:p>
+            <a:pPr algn="ctr"/>
+          </a:p>
+        </p:txBody>
+      </p:sp>
+      <p:sp>
+        <p:nvSpPr>
+          <p:cNvPr id="9" name="TextBox 8"/>
+          <p:cNvSpPr txBox="1"/>
+          <p:nvPr/>
+        </p:nvSpPr>
+        <p:spPr>
+          <a:xfrm>
+            <a:off x="1143000" y="2781300"/>
+            <a:ext cx="8763000" cy="590550"/>
+          </a:xfrm>
+          <a:prstGeom prst="rect">
+            <a:avLst/>
+          </a:prstGeom>
+          <a:noFill/>
+        </p:spPr>
+        <p:txBody>
+          <a:bodyPr wrap="square" lIns="0" rIns="0" tIns="0" bIns="0" anchor="ctr">
+            <a:spAutoFit/>
+          </a:bodyPr>
+          <a:lstStyle/>
+          <a:p>
+            <a:pPr algn="ctr">
+              <a:lnSpc>
+                <a:spcPct val="100000"/>
+              </a:lnSpc>
+            </a:pPr>
+            <a:r>
+              <a:rPr sz="2025" b="1">
+                <a:solidFill>
+                  <a:srgbClr val="FFFFFF"/>
+                </a:solidFill>
+                <a:latin typeface="Pretendard"/>
+                <a:ea typeface="Pretendard"/>
+                <a:cs typeface="Pretendard"/>
+              </a:rPr>
+              <a:t>질의</a:t>
+            </a:r>
+          </a:p>
+        </p:txBody>
+      </p:sp>
+      <p:sp>
+        <p:nvSpPr>
+          <p:cNvPr id="10" name="Rectangle 9"/>
+          <p:cNvSpPr/>
+          <p:nvPr/>
+        </p:nvSpPr>
+        <p:spPr>
+          <a:xfrm>
+            <a:off x="9944100" y="2781300"/>
+            <a:ext cx="7200900" cy="590550"/>
+          </a:xfrm>
+          <a:prstGeom prst="rect">
+            <a:avLst/>
+          </a:prstGeom>
+          <a:solidFill>
+            <a:srgbClr val="1E5BC6"/>
+          </a:solidFill>
+          <a:ln>
+            <a:noFill/>
+          </a:ln>
+          <a:effectLst/>
+        </p:spPr>
+        <p:txBody>
+          <a:bodyPr rtlCol="0" anchor="ctr" wrap="square"/>
+          <a:lstStyle/>
+          <a:p>
+            <a:pPr algn="ctr"/>
+          </a:p>
+        </p:txBody>
+      </p:sp>
+      <p:sp>
+        <p:nvSpPr>
+          <p:cNvPr id="11" name="TextBox 10"/>
+          <p:cNvSpPr txBox="1"/>
+          <p:nvPr/>
+        </p:nvSpPr>
+        <p:spPr>
+          <a:xfrm>
+            <a:off x="9944100" y="2781300"/>
+            <a:ext cx="7200900" cy="590550"/>
+          </a:xfrm>
+          <a:prstGeom prst="rect">
+            <a:avLst/>
+          </a:prstGeom>
+          <a:noFill/>
+        </p:spPr>
+        <p:txBody>
+          <a:bodyPr wrap="square" lIns="0" rIns="0" tIns="0" bIns="0" anchor="ctr">
+            <a:spAutoFit/>
+          </a:bodyPr>
+          <a:lstStyle/>
+          <a:p>
+            <a:pPr algn="ctr">
+              <a:lnSpc>
+                <a:spcPct val="100000"/>
+              </a:lnSpc>
+            </a:pPr>
+            <a:r>
+              <a:rPr sz="2025" b="1">
+                <a:solidFill>
+                  <a:srgbClr val="FFFFFF"/>
+                </a:solidFill>
+                <a:latin typeface="Pretendard"/>
+                <a:ea typeface="Pretendard"/>
+                <a:cs typeface="Pretendard"/>
+              </a:rPr>
+              <a:t>확인 포인트</a:t>
+            </a:r>
+          </a:p>
+        </p:txBody>
+      </p:sp>
+      <p:sp>
+        <p:nvSpPr>
+          <p:cNvPr id="12" name="Rounded Rectangle 11"/>
+          <p:cNvSpPr/>
+          <p:nvPr/>
+        </p:nvSpPr>
+        <p:spPr>
+          <a:xfrm>
+            <a:off x="1143000" y="3448050"/>
+            <a:ext cx="8763000" cy="647700"/>
           </a:xfrm>
           <a:prstGeom prst="roundRect">
             <a:avLst>
-              <a:gd name="adj" fmla="val 1644"/>
+              <a:gd name="adj" fmla="val 5882"/>
+            </a:avLst>
+          </a:prstGeom>
+          <a:solidFill>
+            <a:srgbClr val="EDF3FD"/>
+          </a:solidFill>
+          <a:ln w="9525">
+            <a:solidFill>
+              <a:srgbClr val="BFD3F5"/>
+            </a:solidFill>
+          </a:ln>
+          <a:effectLst/>
+        </p:spPr>
+        <p:txBody>
+          <a:bodyPr rtlCol="0" anchor="ctr" wrap="square"/>
+          <a:lstStyle/>
+          <a:p>
+            <a:pPr algn="ctr"/>
+          </a:p>
+        </p:txBody>
+      </p:sp>
+      <p:sp>
+        <p:nvSpPr>
+          <p:cNvPr id="13" name="TextBox 12"/>
+          <p:cNvSpPr txBox="1"/>
+          <p:nvPr/>
+        </p:nvSpPr>
+        <p:spPr>
+          <a:xfrm>
+            <a:off x="1238250" y="3448050"/>
+            <a:ext cx="8572500" cy="647700"/>
+          </a:xfrm>
+          <a:prstGeom prst="rect">
+            <a:avLst/>
+          </a:prstGeom>
+          <a:noFill/>
+        </p:spPr>
+        <p:txBody>
+          <a:bodyPr wrap="square" lIns="0" rIns="0" tIns="0" bIns="0" anchor="ctr">
+            <a:spAutoFit/>
+          </a:bodyPr>
+          <a:lstStyle/>
+          <a:p>
+            <a:pPr algn="l">
+              <a:lnSpc>
+                <a:spcPct val="115000"/>
+              </a:lnSpc>
+            </a:pPr>
+            <a:r>
+              <a:rPr sz="1875" b="1">
+                <a:solidFill>
+                  <a:srgbClr val="0D2B5E"/>
+                </a:solidFill>
+                <a:latin typeface="Pretendard"/>
+                <a:ea typeface="Pretendard"/>
+                <a:cs typeface="Pretendard"/>
+              </a:rPr>
+              <a:t>WHERE event_type = 'buy'</a:t>
+            </a:r>
+          </a:p>
+        </p:txBody>
+      </p:sp>
+      <p:sp>
+        <p:nvSpPr>
+          <p:cNvPr id="14" name="Rounded Rectangle 13"/>
+          <p:cNvSpPr/>
+          <p:nvPr/>
+        </p:nvSpPr>
+        <p:spPr>
+          <a:xfrm>
+            <a:off x="9944100" y="3448050"/>
+            <a:ext cx="7200900" cy="647700"/>
+          </a:xfrm>
+          <a:prstGeom prst="roundRect">
+            <a:avLst>
+              <a:gd name="adj" fmla="val 5882"/>
             </a:avLst>
           </a:prstGeom>
           <a:solidFill>
@@ -12525,23 +12779,68 @@
       </p:sp>
       <p:sp>
         <p:nvSpPr>
-          <p:cNvPr id="10" name="Rectangle 9"/>
+          <p:cNvPr id="15" name="TextBox 14"/>
+          <p:cNvSpPr txBox="1"/>
+          <p:nvPr/>
+        </p:nvSpPr>
+        <p:spPr>
+          <a:xfrm>
+            <a:off x="10039350" y="3448050"/>
+            <a:ext cx="7010400" cy="647700"/>
+          </a:xfrm>
+          <a:prstGeom prst="rect">
+            <a:avLst/>
+          </a:prstGeom>
+          <a:noFill/>
+        </p:spPr>
+        <p:txBody>
+          <a:bodyPr wrap="square" lIns="0" rIns="0" tIns="0" bIns="0" anchor="ctr">
+            <a:spAutoFit/>
+          </a:bodyPr>
+          <a:lstStyle/>
+          <a:p>
+            <a:pPr algn="ctr">
+              <a:lnSpc>
+                <a:spcPct val="115000"/>
+              </a:lnSpc>
+            </a:pPr>
+            <a:r>
+              <a:rPr sz="1875" b="0">
+                <a:solidFill>
+                  <a:srgbClr val="3D3D3D"/>
+                </a:solidFill>
+                <a:latin typeface="Pretendard"/>
+                <a:ea typeface="Pretendard"/>
+                <a:cs typeface="Pretendard"/>
+              </a:rPr>
+              <a:t>50043 건</a:t>
+            </a:r>
+          </a:p>
+        </p:txBody>
+      </p:sp>
+      <p:sp>
+        <p:nvSpPr>
+          <p:cNvPr id="16" name="Rounded Rectangle 15"/>
           <p:cNvSpPr/>
           <p:nvPr/>
         </p:nvSpPr>
         <p:spPr>
           <a:xfrm>
-            <a:off x="1143000" y="3924300"/>
-            <a:ext cx="2895600" cy="914400"/>
-          </a:xfrm>
-          <a:prstGeom prst="rect">
-            <a:avLst/>
-          </a:prstGeom>
-          <a:solidFill>
-            <a:srgbClr val="0D2B5E"/>
-          </a:solidFill>
-          <a:ln>
-            <a:noFill/>
+            <a:off x="1143000" y="4171950"/>
+            <a:ext cx="8763000" cy="647700"/>
+          </a:xfrm>
+          <a:prstGeom prst="roundRect">
+            <a:avLst>
+              <a:gd name="adj" fmla="val 5882"/>
+            </a:avLst>
+          </a:prstGeom>
+          <a:solidFill>
+            <a:srgbClr val="EDF3FD"/>
+          </a:solidFill>
+          <a:ln w="9525">
+            <a:solidFill>
+              <a:srgbClr val="BFD3F5"/>
+            </a:solidFill>
           </a:ln>
           <a:effectLst/>
         </p:spPr>
@@ -12555,118 +12854,59 @@
       </p:sp>
       <p:sp>
         <p:nvSpPr>
-          <p:cNvPr id="11" name="TextBox 10"/>
-          <p:cNvSpPr txBox="1"/>
-          <p:nvPr/>
-        </p:nvSpPr>
-        <p:spPr>
-          <a:xfrm>
-            <a:off x="1143000" y="4171950"/>
-            <a:ext cx="2895600" cy="419100"/>
-          </a:xfrm>
-          <a:prstGeom prst="rect">
-            <a:avLst/>
-          </a:prstGeom>
-          <a:noFill/>
-        </p:spPr>
-        <p:txBody>
-          <a:bodyPr wrap="square" lIns="0" rIns="0" tIns="0" bIns="0" anchor="t">
-            <a:spAutoFit/>
-          </a:bodyPr>
-          <a:lstStyle/>
-          <a:p>
-            <a:pPr algn="ctr">
-              <a:lnSpc>
-                <a:spcPct val="100000"/>
-              </a:lnSpc>
-            </a:pPr>
-            <a:r>
-              <a:rPr sz="2475" b="1">
-                <a:solidFill>
-                  <a:srgbClr val="FFFFFF"/>
-                </a:solidFill>
-                <a:latin typeface="Pretendard"/>
-                <a:ea typeface="Pretendard"/>
-                <a:cs typeface="Pretendard"/>
-              </a:rPr>
-              <a:t>cd ~ 로 이동</a:t>
-            </a:r>
-          </a:p>
-        </p:txBody>
-      </p:sp>
-      <p:sp>
-        <p:nvSpPr>
-          <p:cNvPr id="12" name="TextBox 11"/>
-          <p:cNvSpPr txBox="1"/>
-          <p:nvPr/>
-        </p:nvSpPr>
-        <p:spPr>
-          <a:xfrm>
-            <a:off x="1352550" y="5143500"/>
-            <a:ext cx="2476500" cy="1524000"/>
-          </a:xfrm>
-          <a:prstGeom prst="rect">
-            <a:avLst/>
-          </a:prstGeom>
-          <a:noFill/>
-        </p:spPr>
-        <p:txBody>
-          <a:bodyPr wrap="square" lIns="0" rIns="0" tIns="0" bIns="0" anchor="t">
-            <a:spAutoFit/>
-          </a:bodyPr>
-          <a:lstStyle/>
-          <a:p>
-            <a:pPr algn="ctr">
-              <a:lnSpc>
-                <a:spcPct val="146000"/>
-              </a:lnSpc>
-            </a:pPr>
-            <a:r>
-              <a:rPr sz="2100" b="0">
-                <a:solidFill>
-                  <a:srgbClr val="3D3D3D"/>
-                </a:solidFill>
-                <a:latin typeface="Pretendard"/>
-                <a:ea typeface="Pretendard"/>
-                <a:cs typeface="Pretendard"/>
-              </a:rPr>
-              <a:t>week3 밖에서</a:t>
-            </a:r>
-          </a:p>
-          <a:p>
-            <a:pPr algn="ctr">
-              <a:lnSpc>
-                <a:spcPct val="146000"/>
-              </a:lnSpc>
-            </a:pPr>
-            <a:r>
-              <a:rPr sz="2100" b="0">
-                <a:solidFill>
-                  <a:srgbClr val="3D3D3D"/>
-                </a:solidFill>
-                <a:latin typeface="Pretendard"/>
-                <a:ea typeface="Pretendard"/>
-                <a:cs typeface="Pretendard"/>
-              </a:rPr>
-              <a:t>파이썬 실행</a:t>
-            </a:r>
-          </a:p>
-        </p:txBody>
-      </p:sp>
-      <p:sp>
-        <p:nvSpPr>
-          <p:cNvPr id="13" name="Rounded Rectangle 12"/>
+          <p:cNvPr id="17" name="TextBox 16"/>
+          <p:cNvSpPr txBox="1"/>
+          <p:nvPr/>
+        </p:nvSpPr>
+        <p:spPr>
+          <a:xfrm>
+            <a:off x="1238250" y="4171950"/>
+            <a:ext cx="8572500" cy="647700"/>
+          </a:xfrm>
+          <a:prstGeom prst="rect">
+            <a:avLst/>
+          </a:prstGeom>
+          <a:noFill/>
+        </p:spPr>
+        <p:txBody>
+          <a:bodyPr wrap="square" lIns="0" rIns="0" tIns="0" bIns="0" anchor="ctr">
+            <a:spAutoFit/>
+          </a:bodyPr>
+          <a:lstStyle/>
+          <a:p>
+            <a:pPr algn="l">
+              <a:lnSpc>
+                <a:spcPct val="115000"/>
+              </a:lnSpc>
+            </a:pPr>
+            <a:r>
+              <a:rPr sz="1875" b="1">
+                <a:solidFill>
+                  <a:srgbClr val="0D2B5E"/>
+                </a:solidFill>
+                <a:latin typeface="Pretendard"/>
+                <a:ea typeface="Pretendard"/>
+                <a:cs typeface="Pretendard"/>
+              </a:rPr>
+              <a:t>WITH daily AS (… date_trunc('day', ts) …)</a:t>
+            </a:r>
+          </a:p>
+        </p:txBody>
+      </p:sp>
+      <p:sp>
+        <p:nvSpPr>
+          <p:cNvPr id="18" name="Rounded Rectangle 17"/>
           <p:cNvSpPr/>
           <p:nvPr/>
         </p:nvSpPr>
         <p:spPr>
           <a:xfrm>
-            <a:off x="4419600" y="3924300"/>
-            <a:ext cx="2895600" cy="3143250"/>
+            <a:off x="9944100" y="4171950"/>
+            <a:ext cx="7200900" cy="647700"/>
           </a:xfrm>
           <a:prstGeom prst="roundRect">
             <a:avLst>
-              <a:gd name="adj" fmla="val 1644"/>
+              <a:gd name="adj" fmla="val 5882"/>
             </a:avLst>
           </a:prstGeom>
           <a:solidFill>
@@ -12689,23 +12929,68 @@
       </p:sp>
       <p:sp>
         <p:nvSpPr>
-          <p:cNvPr id="14" name="Rectangle 13"/>
+          <p:cNvPr id="19" name="TextBox 18"/>
+          <p:cNvSpPr txBox="1"/>
+          <p:nvPr/>
+        </p:nvSpPr>
+        <p:spPr>
+          <a:xfrm>
+            <a:off x="10039350" y="4171950"/>
+            <a:ext cx="7010400" cy="647700"/>
+          </a:xfrm>
+          <a:prstGeom prst="rect">
+            <a:avLst/>
+          </a:prstGeom>
+          <a:noFill/>
+        </p:spPr>
+        <p:txBody>
+          <a:bodyPr wrap="square" lIns="0" rIns="0" tIns="0" bIns="0" anchor="ctr">
+            <a:spAutoFit/>
+          </a:bodyPr>
+          <a:lstStyle/>
+          <a:p>
+            <a:pPr algn="ctr">
+              <a:lnSpc>
+                <a:spcPct val="115000"/>
+              </a:lnSpc>
+            </a:pPr>
+            <a:r>
+              <a:rPr sz="1875" b="0">
+                <a:solidFill>
+                  <a:srgbClr val="3D3D3D"/>
+                </a:solidFill>
+                <a:latin typeface="Pretendard"/>
+                <a:ea typeface="Pretendard"/>
+                <a:cs typeface="Pretendard"/>
+              </a:rPr>
+              <a:t>CTE 가 그대로 동작</a:t>
+            </a:r>
+          </a:p>
+        </p:txBody>
+      </p:sp>
+      <p:sp>
+        <p:nvSpPr>
+          <p:cNvPr id="20" name="Rounded Rectangle 19"/>
           <p:cNvSpPr/>
           <p:nvPr/>
         </p:nvSpPr>
         <p:spPr>
           <a:xfrm>
-            <a:off x="4419600" y="3924300"/>
-            <a:ext cx="2895600" cy="914400"/>
-          </a:xfrm>
-          <a:prstGeom prst="rect">
-            <a:avLst/>
-          </a:prstGeom>
-          <a:solidFill>
-            <a:srgbClr val="1E5BC6"/>
-          </a:solidFill>
-          <a:ln>
-            <a:noFill/>
+            <a:off x="1143000" y="4895850"/>
+            <a:ext cx="8763000" cy="647700"/>
+          </a:xfrm>
+          <a:prstGeom prst="roundRect">
+            <a:avLst>
+              <a:gd name="adj" fmla="val 5882"/>
+            </a:avLst>
+          </a:prstGeom>
+          <a:solidFill>
+            <a:srgbClr val="EDF3FD"/>
+          </a:solidFill>
+          <a:ln w="9525">
+            <a:solidFill>
+              <a:srgbClr val="BFD3F5"/>
+            </a:solidFill>
           </a:ln>
           <a:effectLst/>
         </p:spPr>
@@ -12719,118 +13004,59 @@
       </p:sp>
       <p:sp>
         <p:nvSpPr>
-          <p:cNvPr id="15" name="TextBox 14"/>
-          <p:cNvSpPr txBox="1"/>
-          <p:nvPr/>
-        </p:nvSpPr>
-        <p:spPr>
-          <a:xfrm>
-            <a:off x="4419600" y="4171950"/>
-            <a:ext cx="2895600" cy="419100"/>
-          </a:xfrm>
-          <a:prstGeom prst="rect">
-            <a:avLst/>
-          </a:prstGeom>
-          <a:noFill/>
-        </p:spPr>
-        <p:txBody>
-          <a:bodyPr wrap="square" lIns="0" rIns="0" tIns="0" bIns="0" anchor="t">
-            <a:spAutoFit/>
-          </a:bodyPr>
-          <a:lstStyle/>
-          <a:p>
-            <a:pPr algn="ctr">
-              <a:lnSpc>
-                <a:spcPct val="100000"/>
-              </a:lnSpc>
-            </a:pPr>
-            <a:r>
-              <a:rPr sz="2475" b="1">
-                <a:solidFill>
-                  <a:srgbClr val="FFFFFF"/>
-                </a:solidFill>
-                <a:latin typeface="Pretendard"/>
-                <a:ea typeface="Pretendard"/>
-                <a:cs typeface="Pretendard"/>
-              </a:rPr>
-              <a:t>같은 질의 실행</a:t>
-            </a:r>
-          </a:p>
-        </p:txBody>
-      </p:sp>
-      <p:sp>
-        <p:nvSpPr>
-          <p:cNvPr id="16" name="TextBox 15"/>
-          <p:cNvSpPr txBox="1"/>
-          <p:nvPr/>
-        </p:nvSpPr>
-        <p:spPr>
-          <a:xfrm>
-            <a:off x="4629150" y="5143500"/>
-            <a:ext cx="2476500" cy="1524000"/>
-          </a:xfrm>
-          <a:prstGeom prst="rect">
-            <a:avLst/>
-          </a:prstGeom>
-          <a:noFill/>
-        </p:spPr>
-        <p:txBody>
-          <a:bodyPr wrap="square" lIns="0" rIns="0" tIns="0" bIns="0" anchor="t">
-            <a:spAutoFit/>
-          </a:bodyPr>
-          <a:lstStyle/>
-          <a:p>
-            <a:pPr algn="ctr">
-              <a:lnSpc>
-                <a:spcPct val="146000"/>
-              </a:lnSpc>
-            </a:pPr>
-            <a:r>
-              <a:rPr sz="2100" b="0">
-                <a:solidFill>
-                  <a:srgbClr val="3D3D3D"/>
-                </a:solidFill>
-                <a:latin typeface="Pretendard"/>
-                <a:ea typeface="Pretendard"/>
-                <a:cs typeface="Pretendard"/>
-              </a:rPr>
-              <a:t>FROM 'events.csv'</a:t>
-            </a:r>
-          </a:p>
-          <a:p>
-            <a:pPr algn="ctr">
-              <a:lnSpc>
-                <a:spcPct val="146000"/>
-              </a:lnSpc>
-            </a:pPr>
-            <a:r>
-              <a:rPr sz="2100" b="0">
-                <a:solidFill>
-                  <a:srgbClr val="3D3D3D"/>
-                </a:solidFill>
-                <a:latin typeface="Pretendard"/>
-                <a:ea typeface="Pretendard"/>
-                <a:cs typeface="Pretendard"/>
-              </a:rPr>
-              <a:t>그대로</a:t>
-            </a:r>
-          </a:p>
-        </p:txBody>
-      </p:sp>
-      <p:sp>
-        <p:nvSpPr>
-          <p:cNvPr id="17" name="Rounded Rectangle 16"/>
+          <p:cNvPr id="21" name="TextBox 20"/>
+          <p:cNvSpPr txBox="1"/>
+          <p:nvPr/>
+        </p:nvSpPr>
+        <p:spPr>
+          <a:xfrm>
+            <a:off x="1238250" y="4895850"/>
+            <a:ext cx="8572500" cy="647700"/>
+          </a:xfrm>
+          <a:prstGeom prst="rect">
+            <a:avLst/>
+          </a:prstGeom>
+          <a:noFill/>
+        </p:spPr>
+        <p:txBody>
+          <a:bodyPr wrap="square" lIns="0" rIns="0" tIns="0" bIns="0" anchor="ctr">
+            <a:spAutoFit/>
+          </a:bodyPr>
+          <a:lstStyle/>
+          <a:p>
+            <a:pPr algn="l">
+              <a:lnSpc>
+                <a:spcPct val="115000"/>
+              </a:lnSpc>
+            </a:pPr>
+            <a:r>
+              <a:rPr sz="1875" b="1">
+                <a:solidFill>
+                  <a:srgbClr val="0D2B5E"/>
+                </a:solidFill>
+                <a:latin typeface="Pretendard"/>
+                <a:ea typeface="Pretendard"/>
+                <a:cs typeface="Pretendard"/>
+              </a:rPr>
+              <a:t>sum(total) OVER (PARTITION BY … ORDER BY d)</a:t>
+            </a:r>
+          </a:p>
+        </p:txBody>
+      </p:sp>
+      <p:sp>
+        <p:nvSpPr>
+          <p:cNvPr id="22" name="Rounded Rectangle 21"/>
           <p:cNvSpPr/>
           <p:nvPr/>
         </p:nvSpPr>
         <p:spPr>
           <a:xfrm>
-            <a:off x="7696200" y="3924300"/>
-            <a:ext cx="2895600" cy="3143250"/>
+            <a:off x="9944100" y="4895850"/>
+            <a:ext cx="7200900" cy="647700"/>
           </a:xfrm>
           <a:prstGeom prst="roundRect">
             <a:avLst>
-              <a:gd name="adj" fmla="val 1644"/>
+              <a:gd name="adj" fmla="val 5882"/>
             </a:avLst>
           </a:prstGeom>
           <a:solidFill>
@@ -12853,23 +13079,68 @@
       </p:sp>
       <p:sp>
         <p:nvSpPr>
-          <p:cNvPr id="18" name="Rectangle 17"/>
+          <p:cNvPr id="23" name="TextBox 22"/>
+          <p:cNvSpPr txBox="1"/>
+          <p:nvPr/>
+        </p:nvSpPr>
+        <p:spPr>
+          <a:xfrm>
+            <a:off x="10039350" y="4895850"/>
+            <a:ext cx="7010400" cy="647700"/>
+          </a:xfrm>
+          <a:prstGeom prst="rect">
+            <a:avLst/>
+          </a:prstGeom>
+          <a:noFill/>
+        </p:spPr>
+        <p:txBody>
+          <a:bodyPr wrap="square" lIns="0" rIns="0" tIns="0" bIns="0" anchor="ctr">
+            <a:spAutoFit/>
+          </a:bodyPr>
+          <a:lstStyle/>
+          <a:p>
+            <a:pPr algn="ctr">
+              <a:lnSpc>
+                <a:spcPct val="115000"/>
+              </a:lnSpc>
+            </a:pPr>
+            <a:r>
+              <a:rPr sz="1875" b="0">
+                <a:solidFill>
+                  <a:srgbClr val="3D3D3D"/>
+                </a:solidFill>
+                <a:latin typeface="Pretendard"/>
+                <a:ea typeface="Pretendard"/>
+                <a:cs typeface="Pretendard"/>
+              </a:rPr>
+              <a:t>buy 6행 — 4064300 → 8372100 …</a:t>
+            </a:r>
+          </a:p>
+        </p:txBody>
+      </p:sp>
+      <p:sp>
+        <p:nvSpPr>
+          <p:cNvPr id="24" name="Rounded Rectangle 23"/>
           <p:cNvSpPr/>
           <p:nvPr/>
         </p:nvSpPr>
         <p:spPr>
           <a:xfrm>
-            <a:off x="7696200" y="3924300"/>
-            <a:ext cx="2895600" cy="914400"/>
-          </a:xfrm>
-          <a:prstGeom prst="rect">
-            <a:avLst/>
-          </a:prstGeom>
-          <a:solidFill>
-            <a:srgbClr val="0D2B5E"/>
-          </a:solidFill>
-          <a:ln>
-            <a:noFill/>
+            <a:off x="1143000" y="5619750"/>
+            <a:ext cx="8763000" cy="647700"/>
+          </a:xfrm>
+          <a:prstGeom prst="roundRect">
+            <a:avLst>
+              <a:gd name="adj" fmla="val 5882"/>
+            </a:avLst>
+          </a:prstGeom>
+          <a:solidFill>
+            <a:srgbClr val="EDF3FD"/>
+          </a:solidFill>
+          <a:ln w="9525">
+            <a:solidFill>
+              <a:srgbClr val="BFD3F5"/>
+            </a:solidFill>
           </a:ln>
           <a:effectLst/>
         </p:spPr>
@@ -12883,118 +13154,59 @@
       </p:sp>
       <p:sp>
         <p:nvSpPr>
-          <p:cNvPr id="19" name="TextBox 18"/>
-          <p:cNvSpPr txBox="1"/>
-          <p:nvPr/>
-        </p:nvSpPr>
-        <p:spPr>
-          <a:xfrm>
-            <a:off x="7696200" y="4171950"/>
-            <a:ext cx="2895600" cy="419100"/>
-          </a:xfrm>
-          <a:prstGeom prst="rect">
-            <a:avLst/>
-          </a:prstGeom>
-          <a:noFill/>
-        </p:spPr>
-        <p:txBody>
-          <a:bodyPr wrap="square" lIns="0" rIns="0" tIns="0" bIns="0" anchor="t">
-            <a:spAutoFit/>
-          </a:bodyPr>
-          <a:lstStyle/>
-          <a:p>
-            <a:pPr algn="ctr">
-              <a:lnSpc>
-                <a:spcPct val="100000"/>
-              </a:lnSpc>
-            </a:pPr>
-            <a:r>
-              <a:rPr sz="2475" b="1">
-                <a:solidFill>
-                  <a:srgbClr val="FFFFFF"/>
-                </a:solidFill>
-                <a:latin typeface="Pretendard"/>
-                <a:ea typeface="Pretendard"/>
-                <a:cs typeface="Pretendard"/>
-              </a:rPr>
-              <a:t>IO Error</a:t>
-            </a:r>
-          </a:p>
-        </p:txBody>
-      </p:sp>
-      <p:sp>
-        <p:nvSpPr>
-          <p:cNvPr id="20" name="TextBox 19"/>
-          <p:cNvSpPr txBox="1"/>
-          <p:nvPr/>
-        </p:nvSpPr>
-        <p:spPr>
-          <a:xfrm>
-            <a:off x="7905750" y="5143500"/>
-            <a:ext cx="2476500" cy="1524000"/>
-          </a:xfrm>
-          <a:prstGeom prst="rect">
-            <a:avLst/>
-          </a:prstGeom>
-          <a:noFill/>
-        </p:spPr>
-        <p:txBody>
-          <a:bodyPr wrap="square" lIns="0" rIns="0" tIns="0" bIns="0" anchor="t">
-            <a:spAutoFit/>
-          </a:bodyPr>
-          <a:lstStyle/>
-          <a:p>
-            <a:pPr algn="ctr">
-              <a:lnSpc>
-                <a:spcPct val="146000"/>
-              </a:lnSpc>
-            </a:pPr>
-            <a:r>
-              <a:rPr sz="2100" b="0">
-                <a:solidFill>
-                  <a:srgbClr val="3D3D3D"/>
-                </a:solidFill>
-                <a:latin typeface="Pretendard"/>
-                <a:ea typeface="Pretendard"/>
-                <a:cs typeface="Pretendard"/>
-              </a:rPr>
-              <a:t>No files found</a:t>
-            </a:r>
-          </a:p>
-          <a:p>
-            <a:pPr algn="ctr">
-              <a:lnSpc>
-                <a:spcPct val="146000"/>
-              </a:lnSpc>
-            </a:pPr>
-            <a:r>
-              <a:rPr sz="2100" b="0">
-                <a:solidFill>
-                  <a:srgbClr val="3D3D3D"/>
-                </a:solidFill>
-                <a:latin typeface="Pretendard"/>
-                <a:ea typeface="Pretendard"/>
-                <a:cs typeface="Pretendard"/>
-              </a:rPr>
-              <a:t>류의 오류</a:t>
-            </a:r>
-          </a:p>
-        </p:txBody>
-      </p:sp>
-      <p:sp>
-        <p:nvSpPr>
-          <p:cNvPr id="21" name="Rounded Rectangle 20"/>
+          <p:cNvPr id="25" name="TextBox 24"/>
+          <p:cNvSpPr txBox="1"/>
+          <p:nvPr/>
+        </p:nvSpPr>
+        <p:spPr>
+          <a:xfrm>
+            <a:off x="1238250" y="5619750"/>
+            <a:ext cx="8572500" cy="647700"/>
+          </a:xfrm>
+          <a:prstGeom prst="rect">
+            <a:avLst/>
+          </a:prstGeom>
+          <a:noFill/>
+        </p:spPr>
+        <p:txBody>
+          <a:bodyPr wrap="square" lIns="0" rIns="0" tIns="0" bIns="0" anchor="ctr">
+            <a:spAutoFit/>
+          </a:bodyPr>
+          <a:lstStyle/>
+          <a:p>
+            <a:pPr algn="l">
+              <a:lnSpc>
+                <a:spcPct val="115000"/>
+              </a:lnSpc>
+            </a:pPr>
+            <a:r>
+              <a:rPr sz="1875" b="1">
+                <a:solidFill>
+                  <a:srgbClr val="0D2B5E"/>
+                </a:solidFill>
+                <a:latin typeface="Pretendard"/>
+                <a:ea typeface="Pretendard"/>
+                <a:cs typeface="Pretendard"/>
+              </a:rPr>
+              <a:t>GROUP BY 1, 2</a:t>
+            </a:r>
+          </a:p>
+        </p:txBody>
+      </p:sp>
+      <p:sp>
+        <p:nvSpPr>
+          <p:cNvPr id="26" name="Rounded Rectangle 25"/>
           <p:cNvSpPr/>
           <p:nvPr/>
         </p:nvSpPr>
         <p:spPr>
           <a:xfrm>
-            <a:off x="10972800" y="3924300"/>
-            <a:ext cx="2895600" cy="3143250"/>
+            <a:off x="9944100" y="5619750"/>
+            <a:ext cx="7200900" cy="647700"/>
           </a:xfrm>
           <a:prstGeom prst="roundRect">
             <a:avLst>
-              <a:gd name="adj" fmla="val 1644"/>
+              <a:gd name="adj" fmla="val 5882"/>
             </a:avLst>
           </a:prstGeom>
           <a:solidFill>
@@ -13017,44 +13229,55 @@
       </p:sp>
       <p:sp>
         <p:nvSpPr>
-          <p:cNvPr id="22" name="Rectangle 21"/>
-          <p:cNvSpPr/>
-          <p:nvPr/>
-        </p:nvSpPr>
-        <p:spPr>
-          <a:xfrm>
-            <a:off x="10972800" y="3924300"/>
-            <a:ext cx="2895600" cy="914400"/>
-          </a:xfrm>
-          <a:prstGeom prst="rect">
-            <a:avLst/>
-          </a:prstGeom>
-          <a:solidFill>
-            <a:srgbClr val="1E5BC6"/>
-          </a:solidFill>
-          <a:ln>
-            <a:noFill/>
-          </a:ln>
-          <a:effectLst/>
-        </p:spPr>
-        <p:txBody>
-          <a:bodyPr rtlCol="0" anchor="ctr" wrap="square"/>
-          <a:lstStyle/>
-          <a:p>
-            <a:pPr algn="ctr"/>
-          </a:p>
-        </p:txBody>
-      </p:sp>
-      <p:sp>
-        <p:nvSpPr>
-          <p:cNvPr id="23" name="TextBox 22"/>
-          <p:cNvSpPr txBox="1"/>
-          <p:nvPr/>
-        </p:nvSpPr>
-        <p:spPr>
-          <a:xfrm>
-            <a:off x="10972800" y="4171950"/>
-            <a:ext cx="2895600" cy="419100"/>
+          <p:cNvPr id="27" name="TextBox 26"/>
+          <p:cNvSpPr txBox="1"/>
+          <p:nvPr/>
+        </p:nvSpPr>
+        <p:spPr>
+          <a:xfrm>
+            <a:off x="10039350" y="5619750"/>
+            <a:ext cx="7010400" cy="647700"/>
+          </a:xfrm>
+          <a:prstGeom prst="rect">
+            <a:avLst/>
+          </a:prstGeom>
+          <a:noFill/>
+        </p:spPr>
+        <p:txBody>
+          <a:bodyPr wrap="square" lIns="0" rIns="0" tIns="0" bIns="0" anchor="ctr">
+            <a:spAutoFit/>
+          </a:bodyPr>
+          <a:lstStyle/>
+          <a:p>
+            <a:pPr algn="ctr">
+              <a:lnSpc>
+                <a:spcPct val="115000"/>
+              </a:lnSpc>
+            </a:pPr>
+            <a:r>
+              <a:rPr sz="1875" b="0">
+                <a:solidFill>
+                  <a:srgbClr val="3D3D3D"/>
+                </a:solidFill>
+                <a:latin typeface="Pretendard"/>
+                <a:ea typeface="Pretendard"/>
+                <a:cs typeface="Pretendard"/>
+              </a:rPr>
+              <a:t>식이 길 때 반복을 줄인다</a:t>
+            </a:r>
+          </a:p>
+        </p:txBody>
+      </p:sp>
+      <p:sp>
+        <p:nvSpPr>
+          <p:cNvPr id="28" name="TextBox 27"/>
+          <p:cNvSpPr txBox="1"/>
+          <p:nvPr/>
+        </p:nvSpPr>
+        <p:spPr>
+          <a:xfrm>
+            <a:off x="1143000" y="7620000"/>
+            <a:ext cx="16002000" cy="342900"/>
           </a:xfrm>
           <a:prstGeom prst="rect">
             <a:avLst/>
@@ -13067,244 +13290,21 @@
           </a:bodyPr>
           <a:lstStyle/>
           <a:p>
-            <a:pPr algn="ctr">
+            <a:pPr algn="l">
               <a:lnSpc>
                 <a:spcPct val="100000"/>
               </a:lnSpc>
             </a:pPr>
             <a:r>
-              <a:rPr sz="2475" b="1">
-                <a:solidFill>
-                  <a:srgbClr val="FFFFFF"/>
-                </a:solidFill>
-                <a:latin typeface="Pretendard"/>
-                <a:ea typeface="Pretendard"/>
-                <a:cs typeface="Pretendard"/>
-              </a:rPr>
-              <a:t>pwd · ls</a:t>
-            </a:r>
-          </a:p>
-        </p:txBody>
-      </p:sp>
-      <p:sp>
-        <p:nvSpPr>
-          <p:cNvPr id="24" name="TextBox 23"/>
-          <p:cNvSpPr txBox="1"/>
-          <p:nvPr/>
-        </p:nvSpPr>
-        <p:spPr>
-          <a:xfrm>
-            <a:off x="11182350" y="5143500"/>
-            <a:ext cx="2476500" cy="1524000"/>
-          </a:xfrm>
-          <a:prstGeom prst="rect">
-            <a:avLst/>
-          </a:prstGeom>
-          <a:noFill/>
-        </p:spPr>
-        <p:txBody>
-          <a:bodyPr wrap="square" lIns="0" rIns="0" tIns="0" bIns="0" anchor="t">
-            <a:spAutoFit/>
-          </a:bodyPr>
-          <a:lstStyle/>
-          <a:p>
-            <a:pPr algn="ctr">
-              <a:lnSpc>
-                <a:spcPct val="146000"/>
-              </a:lnSpc>
-            </a:pPr>
-            <a:r>
-              <a:rPr sz="2100" b="0">
-                <a:solidFill>
-                  <a:srgbClr val="3D3D3D"/>
-                </a:solidFill>
-                <a:latin typeface="Pretendard"/>
-                <a:ea typeface="Pretendard"/>
-                <a:cs typeface="Pretendard"/>
-              </a:rPr>
-              <a:t>실행 위치와</a:t>
-            </a:r>
-          </a:p>
-          <a:p>
-            <a:pPr algn="ctr">
-              <a:lnSpc>
-                <a:spcPct val="146000"/>
-              </a:lnSpc>
-            </a:pPr>
-            <a:r>
-              <a:rPr sz="2100" b="0">
-                <a:solidFill>
-                  <a:srgbClr val="3D3D3D"/>
-                </a:solidFill>
-                <a:latin typeface="Pretendard"/>
-                <a:ea typeface="Pretendard"/>
-                <a:cs typeface="Pretendard"/>
-              </a:rPr>
-              <a:t>파일 존재 확인</a:t>
-            </a:r>
-          </a:p>
-        </p:txBody>
-      </p:sp>
-      <p:sp>
-        <p:nvSpPr>
-          <p:cNvPr id="25" name="Rounded Rectangle 24"/>
-          <p:cNvSpPr/>
-          <p:nvPr/>
-        </p:nvSpPr>
-        <p:spPr>
-          <a:xfrm>
-            <a:off x="14249400" y="3924300"/>
-            <a:ext cx="2895600" cy="3143250"/>
-          </a:xfrm>
-          <a:prstGeom prst="roundRect">
-            <a:avLst>
-              <a:gd name="adj" fmla="val 1644"/>
-            </a:avLst>
-          </a:prstGeom>
-          <a:solidFill>
-            <a:srgbClr val="FAFBFD"/>
-          </a:solidFill>
-          <a:ln w="9525">
-            <a:solidFill>
-              <a:srgbClr val="DCE1E8"/>
-            </a:solidFill>
-          </a:ln>
-          <a:effectLst/>
-        </p:spPr>
-        <p:txBody>
-          <a:bodyPr rtlCol="0" anchor="ctr" wrap="square"/>
-          <a:lstStyle/>
-          <a:p>
-            <a:pPr algn="ctr"/>
-          </a:p>
-        </p:txBody>
-      </p:sp>
-      <p:sp>
-        <p:nvSpPr>
-          <p:cNvPr id="26" name="Rectangle 25"/>
-          <p:cNvSpPr/>
-          <p:nvPr/>
-        </p:nvSpPr>
-        <p:spPr>
-          <a:xfrm>
-            <a:off x="14249400" y="3924300"/>
-            <a:ext cx="2895600" cy="914400"/>
-          </a:xfrm>
-          <a:prstGeom prst="rect">
-            <a:avLst/>
-          </a:prstGeom>
-          <a:solidFill>
-            <a:srgbClr val="0D2B5E"/>
-          </a:solidFill>
-          <a:ln>
-            <a:noFill/>
-          </a:ln>
-          <a:effectLst/>
-        </p:spPr>
-        <p:txBody>
-          <a:bodyPr rtlCol="0" anchor="ctr" wrap="square"/>
-          <a:lstStyle/>
-          <a:p>
-            <a:pPr algn="ctr"/>
-          </a:p>
-        </p:txBody>
-      </p:sp>
-      <p:sp>
-        <p:nvSpPr>
-          <p:cNvPr id="27" name="TextBox 26"/>
-          <p:cNvSpPr txBox="1"/>
-          <p:nvPr/>
-        </p:nvSpPr>
-        <p:spPr>
-          <a:xfrm>
-            <a:off x="14249400" y="4171950"/>
-            <a:ext cx="2895600" cy="419100"/>
-          </a:xfrm>
-          <a:prstGeom prst="rect">
-            <a:avLst/>
-          </a:prstGeom>
-          <a:noFill/>
-        </p:spPr>
-        <p:txBody>
-          <a:bodyPr wrap="square" lIns="0" rIns="0" tIns="0" bIns="0" anchor="t">
-            <a:spAutoFit/>
-          </a:bodyPr>
-          <a:lstStyle/>
-          <a:p>
-            <a:pPr algn="ctr">
-              <a:lnSpc>
-                <a:spcPct val="100000"/>
-              </a:lnSpc>
-            </a:pPr>
-            <a:r>
-              <a:rPr sz="2475" b="1">
-                <a:solidFill>
-                  <a:srgbClr val="FFFFFF"/>
-                </a:solidFill>
-                <a:latin typeface="Pretendard"/>
-                <a:ea typeface="Pretendard"/>
-                <a:cs typeface="Pretendard"/>
-              </a:rPr>
-              <a:t>돌아가서 재실행</a:t>
-            </a:r>
-          </a:p>
-        </p:txBody>
-      </p:sp>
-      <p:sp>
-        <p:nvSpPr>
-          <p:cNvPr id="28" name="TextBox 27"/>
-          <p:cNvSpPr txBox="1"/>
-          <p:nvPr/>
-        </p:nvSpPr>
-        <p:spPr>
-          <a:xfrm>
-            <a:off x="14458950" y="5143500"/>
-            <a:ext cx="2476500" cy="1524000"/>
-          </a:xfrm>
-          <a:prstGeom prst="rect">
-            <a:avLst/>
-          </a:prstGeom>
-          <a:noFill/>
-        </p:spPr>
-        <p:txBody>
-          <a:bodyPr wrap="square" lIns="0" rIns="0" tIns="0" bIns="0" anchor="t">
-            <a:spAutoFit/>
-          </a:bodyPr>
-          <a:lstStyle/>
-          <a:p>
-            <a:pPr algn="ctr">
-              <a:lnSpc>
-                <a:spcPct val="146000"/>
-              </a:lnSpc>
-            </a:pPr>
-            <a:r>
-              <a:rPr sz="2100" b="0">
-                <a:solidFill>
-                  <a:srgbClr val="3D3D3D"/>
-                </a:solidFill>
-                <a:latin typeface="Pretendard"/>
-                <a:ea typeface="Pretendard"/>
-                <a:cs typeface="Pretendard"/>
-              </a:rPr>
-              <a:t>cd week3 또는</a:t>
-            </a:r>
-          </a:p>
-          <a:p>
-            <a:pPr algn="ctr">
-              <a:lnSpc>
-                <a:spcPct val="146000"/>
-              </a:lnSpc>
-            </a:pPr>
-            <a:r>
-              <a:rPr sz="2100" b="0">
-                <a:solidFill>
-                  <a:srgbClr val="3D3D3D"/>
-                </a:solidFill>
-                <a:latin typeface="Pretendard"/>
-                <a:ea typeface="Pretendard"/>
-                <a:cs typeface="Pretendard"/>
-              </a:rPr>
-              <a:t>절대 경로</a:t>
+              <a:rPr sz="1875" b="1">
+                <a:solidFill>
+                  <a:srgbClr val="7D7D7D"/>
+                </a:solidFill>
+                <a:latin typeface="Pretendard"/>
+                <a:ea typeface="Pretendard"/>
+                <a:cs typeface="Pretendard"/>
+              </a:rPr>
+              <a:t>GROUP BY 1, 2 는 「SELECT 의 첫째·둘째 식으로 묶어라」 — DuckDB·PostgreSQL·MySQL 모두 되는 문법</a:t>
             </a:r>
           </a:p>
         </p:txBody>
@@ -13441,7 +13441,7 @@
       <p:grpSpPr/>
       <p:sp>
         <p:nvSpPr>
-          <p:cNvPr id="2" name="Oval 1"/>
+          <p:cNvPr id="2" name="deckgen:decor"/>
           <p:cNvSpPr/>
           <p:nvPr/>
         </p:nvSpPr>
@@ -13471,7 +13471,7 @@
       </p:sp>
       <p:sp>
         <p:nvSpPr>
-          <p:cNvPr id="3" name="Oval 2"/>
+          <p:cNvPr id="3" name="deckgen:decor"/>
           <p:cNvSpPr/>
           <p:nvPr/>
         </p:nvSpPr>
@@ -13501,7 +13501,7 @@
       </p:sp>
       <p:sp>
         <p:nvSpPr>
-          <p:cNvPr id="4" name="Oval 3"/>
+          <p:cNvPr id="4" name="deckgen:decor"/>
           <p:cNvSpPr/>
           <p:nvPr/>
         </p:nvSpPr>
@@ -13718,7 +13718,7 @@
                 <a:ea typeface="Pretendard"/>
                 <a:cs typeface="Pretendard"/>
               </a:rPr>
-              <a:t>DuckDB 로 줄이고 Pandas 로 잇는 기본 패턴</a:t>
+              <a:t>ORDER BY 를 넣는다 — 빼면 행 순서가 흔들린다</a:t>
             </a:r>
           </a:p>
         </p:txBody>
@@ -13823,7 +13823,7 @@
                 <a:ea typeface="Pretendard"/>
                 <a:cs typeface="Pretendard"/>
               </a:rPr>
-              <a:t>duckdb.sql("…GROUP BY event_type").df()</a:t>
+              <a:t>duckdb.sql("… ORDER BY cnt DESC").df()</a:t>
             </a:r>
           </a:p>
         </p:txBody>
@@ -13894,7 +13894,7 @@
                 <a:ea typeface="Pretendard"/>
                 <a:cs typeface="Pretendard"/>
               </a:rPr>
-              <a:t>type 이 DataFrame · 3행 · df.dtypes</a:t>
+              <a:t>&lt;class 'pandas.DataFrame'&gt; · 3행</a:t>
             </a:r>
           </a:p>
         </p:txBody>
@@ -13965,7 +13965,7 @@
                 <a:ea typeface="Pretendard"/>
                 <a:cs typeface="Pretendard"/>
               </a:rPr>
-              <a:t>3-4·3-5 의 기본 형태</a:t>
+              <a:t>avg_value 5001.49 · 4996.51 · 4993.89</a:t>
             </a:r>
           </a:p>
         </p:txBody>
@@ -14294,7 +14294,7 @@
                 <a:ea typeface="Pretendard"/>
                 <a:cs typeface="Pretendard"/>
               </a:rPr>
-              <a:t>지역 4곳 집계가 나오면 성공</a:t>
+              <a:t>부산 276 · 경기 254 · 서울 235 · 광주 250</a:t>
             </a:r>
           </a:p>
         </p:txBody>
